--- a/chapter1/clips/clip-03-dataset-formats/clip.pptx
+++ b/chapter1/clips/clip-03-dataset-formats/clip.pptx
@@ -10,10 +10,9 @@
     <p:sldId id="258" r:id="rId9"/>
     <p:sldId id="259" r:id="rId10"/>
     <p:sldId id="260" r:id="rId11"/>
-    <p:sldId id="261" r:id="rId12"/>
-    <p:sldId id="262" r:id="rId13"/>
-    <p:sldId id="263" r:id="rId14"/>
-    <p:sldId id="264" r:id="rId15"/>
+    <p:sldId id="261" r:id="rId13"/>
+    <p:sldId id="262" r:id="rId14"/>
+    <p:sldId id="263" r:id="rId15"/>
   </p:sldIdLst>
   <p:sldSz cx="12191695" cy="6858000" type="screen4x3"/>
   <p:notesSz cx="6858000" cy="9144000"/>
@@ -113,6 +112,516 @@
     </a:lvl9pPr>
   </p:defaultTextStyle>
 </p:presentation>
+</file>
+
+<file path=ppt/notesMasters/notesMaster1.xml><?xml version="1.0" encoding="utf-8"?>
+<p:notesMaster xmlns:a="http://schemas.openxmlformats.org/drawingml/2006/main" xmlns:p="http://schemas.openxmlformats.org/presentationml/2006/main" xmlns:r="http://schemas.openxmlformats.org/officeDocument/2006/relationships">
+  <p:cSld>
+    <p:bg>
+      <p:bgRef idx="1001">
+        <a:schemeClr val="bg1"/>
+      </p:bgRef>
+    </p:bg>
+    <p:spTree>
+      <p:nvGrpSpPr>
+        <p:cNvPr id="1" name=""/>
+        <p:cNvGrpSpPr/>
+        <p:nvPr/>
+      </p:nvGrpSpPr>
+      <p:grpSpPr>
+        <a:xfrm>
+          <a:off x="0" y="0"/>
+          <a:ext cx="0" cy="0"/>
+          <a:chOff x="0" y="0"/>
+          <a:chExt cx="0" cy="0"/>
+        </a:xfrm>
+      </p:grpSpPr>
+      <p:sp>
+        <p:nvSpPr>
+          <p:cNvPr id="2" name="Header Placeholder 1"/>
+          <p:cNvSpPr>
+            <a:spLocks noGrp="1"/>
+          </p:cNvSpPr>
+          <p:nvPr>
+            <p:ph type="hdr" sz="quarter"/>
+          </p:nvPr>
+        </p:nvSpPr>
+        <p:spPr>
+          <a:xfrm>
+            <a:off x="0" y="0"/>
+            <a:ext cx="2971800" cy="457200"/>
+          </a:xfrm>
+          <a:prstGeom prst="rect">
+            <a:avLst/>
+          </a:prstGeom>
+        </p:spPr>
+        <p:txBody>
+          <a:bodyPr vert="horz" lIns="91440" tIns="45720" rIns="91440" bIns="45720" rtlCol="0"/>
+          <a:lstStyle>
+            <a:lvl1pPr algn="l">
+              <a:defRPr sz="1200"/>
+            </a:lvl1pPr>
+          </a:lstStyle>
+          <a:p>
+            <a:endParaRPr lang="en-US"/>
+          </a:p>
+        </p:txBody>
+      </p:sp>
+      <p:sp>
+        <p:nvSpPr>
+          <p:cNvPr id="3" name="Date Placeholder 2"/>
+          <p:cNvSpPr>
+            <a:spLocks noGrp="1"/>
+          </p:cNvSpPr>
+          <p:nvPr>
+            <p:ph type="dt" idx="1"/>
+          </p:nvPr>
+        </p:nvSpPr>
+        <p:spPr>
+          <a:xfrm>
+            <a:off x="3884613" y="0"/>
+            <a:ext cx="2971800" cy="457200"/>
+          </a:xfrm>
+          <a:prstGeom prst="rect">
+            <a:avLst/>
+          </a:prstGeom>
+        </p:spPr>
+        <p:txBody>
+          <a:bodyPr vert="horz" lIns="91440" tIns="45720" rIns="91440" bIns="45720" rtlCol="0"/>
+          <a:lstStyle>
+            <a:lvl1pPr algn="r">
+              <a:defRPr sz="1200"/>
+            </a:lvl1pPr>
+          </a:lstStyle>
+          <a:p>
+            <a:fld id="{0F89C1C7-3DCD-1040-A9CF-14679D8B5DDD}" type="datetimeFigureOut">
+              <a:rPr lang="en-US" smtClean="0"/>
+              <a:t>10/17/16</a:t>
+            </a:fld>
+            <a:endParaRPr lang="en-US"/>
+          </a:p>
+        </p:txBody>
+      </p:sp>
+      <p:sp>
+        <p:nvSpPr>
+          <p:cNvPr id="4" name="Slide Image Placeholder 3"/>
+          <p:cNvSpPr>
+            <a:spLocks noGrp="1" noRot="1" noChangeAspect="1"/>
+          </p:cNvSpPr>
+          <p:nvPr>
+            <p:ph type="sldImg" idx="2"/>
+          </p:nvPr>
+        </p:nvSpPr>
+        <p:spPr>
+          <a:xfrm>
+            <a:off x="1143000" y="685800"/>
+            <a:ext cx="4572000" cy="3429000"/>
+          </a:xfrm>
+          <a:prstGeom prst="rect">
+            <a:avLst/>
+          </a:prstGeom>
+          <a:noFill/>
+          <a:ln w="12700">
+            <a:solidFill>
+              <a:prstClr val="black"/>
+            </a:solidFill>
+          </a:ln>
+        </p:spPr>
+        <p:txBody>
+          <a:bodyPr vert="horz" lIns="91440" tIns="45720" rIns="91440" bIns="45720" rtlCol="0" anchor="ctr"/>
+          <a:lstStyle/>
+          <a:p>
+            <a:endParaRPr lang="en-US"/>
+          </a:p>
+        </p:txBody>
+      </p:sp>
+      <p:sp>
+        <p:nvSpPr>
+          <p:cNvPr id="5" name="Notes Placeholder 4"/>
+          <p:cNvSpPr>
+            <a:spLocks noGrp="1"/>
+          </p:cNvSpPr>
+          <p:nvPr>
+            <p:ph type="body" sz="quarter" idx="3"/>
+          </p:nvPr>
+        </p:nvSpPr>
+        <p:spPr>
+          <a:xfrm>
+            <a:off x="685800" y="4343400"/>
+            <a:ext cx="5486400" cy="4114800"/>
+          </a:xfrm>
+          <a:prstGeom prst="rect">
+            <a:avLst/>
+          </a:prstGeom>
+        </p:spPr>
+        <p:txBody>
+          <a:bodyPr vert="horz" lIns="91440" tIns="45720" rIns="91440" bIns="45720" rtlCol="0"/>
+          <a:lstStyle/>
+          <a:p>
+            <a:pPr lvl="0"/>
+            <a:r>
+              <a:rPr lang="en-US" smtClean="0"/>
+              <a:t>Click to edit Master text styles</a:t>
+            </a:r>
+          </a:p>
+          <a:p>
+            <a:pPr lvl="1"/>
+            <a:r>
+              <a:rPr lang="en-US" smtClean="0"/>
+              <a:t>Second level</a:t>
+            </a:r>
+          </a:p>
+          <a:p>
+            <a:pPr lvl="2"/>
+            <a:r>
+              <a:rPr lang="en-US" smtClean="0"/>
+              <a:t>Third level</a:t>
+            </a:r>
+          </a:p>
+          <a:p>
+            <a:pPr lvl="3"/>
+            <a:r>
+              <a:rPr lang="en-US" smtClean="0"/>
+              <a:t>Fourth level</a:t>
+            </a:r>
+          </a:p>
+          <a:p>
+            <a:pPr lvl="4"/>
+            <a:r>
+              <a:rPr lang="en-US" smtClean="0"/>
+              <a:t>Fifth level</a:t>
+            </a:r>
+            <a:endParaRPr lang="en-US"/>
+          </a:p>
+        </p:txBody>
+      </p:sp>
+      <p:sp>
+        <p:nvSpPr>
+          <p:cNvPr id="6" name="Footer Placeholder 5"/>
+          <p:cNvSpPr>
+            <a:spLocks noGrp="1"/>
+          </p:cNvSpPr>
+          <p:nvPr>
+            <p:ph type="ftr" sz="quarter" idx="4"/>
+          </p:nvPr>
+        </p:nvSpPr>
+        <p:spPr>
+          <a:xfrm>
+            <a:off x="0" y="8685213"/>
+            <a:ext cx="2971800" cy="457200"/>
+          </a:xfrm>
+          <a:prstGeom prst="rect">
+            <a:avLst/>
+          </a:prstGeom>
+        </p:spPr>
+        <p:txBody>
+          <a:bodyPr vert="horz" lIns="91440" tIns="45720" rIns="91440" bIns="45720" rtlCol="0" anchor="b"/>
+          <a:lstStyle>
+            <a:lvl1pPr algn="l">
+              <a:defRPr sz="1200"/>
+            </a:lvl1pPr>
+          </a:lstStyle>
+          <a:p>
+            <a:endParaRPr lang="en-US"/>
+          </a:p>
+        </p:txBody>
+      </p:sp>
+      <p:sp>
+        <p:nvSpPr>
+          <p:cNvPr id="7" name="Slide Number Placeholder 6"/>
+          <p:cNvSpPr>
+            <a:spLocks noGrp="1"/>
+          </p:cNvSpPr>
+          <p:nvPr>
+            <p:ph type="sldNum" sz="quarter" idx="5"/>
+          </p:nvPr>
+        </p:nvSpPr>
+        <p:spPr>
+          <a:xfrm>
+            <a:off x="3884613" y="8685213"/>
+            <a:ext cx="2971800" cy="457200"/>
+          </a:xfrm>
+          <a:prstGeom prst="rect">
+            <a:avLst/>
+          </a:prstGeom>
+        </p:spPr>
+        <p:txBody>
+          <a:bodyPr vert="horz" lIns="91440" tIns="45720" rIns="91440" bIns="45720" rtlCol="0" anchor="b"/>
+          <a:lstStyle>
+            <a:lvl1pPr algn="r">
+              <a:defRPr sz="1200"/>
+            </a:lvl1pPr>
+          </a:lstStyle>
+          <a:p>
+            <a:fld id="{BB5E49A5-4136-284D-997B-48E1D791AD67}" type="slidenum">
+              <a:rPr lang="en-US" smtClean="0"/>
+              <a:t>‹#›</a:t>
+            </a:fld>
+            <a:endParaRPr lang="en-US"/>
+          </a:p>
+        </p:txBody>
+      </p:sp>
+    </p:spTree>
+    <p:extLst>
+      <p:ext uri="{BB962C8B-B14F-4D97-AF65-F5344CB8AC3E}">
+        <p14:creationId xmlns:p14="http://schemas.microsoft.com/office/powerpoint/2010/main" val="2623252185"/>
+      </p:ext>
+    </p:extLst>
+  </p:cSld>
+  <p:clrMap bg1="lt1" tx1="dk1" bg2="lt2" tx2="dk2" accent1="accent1" accent2="accent2" accent3="accent3" accent4="accent4" accent5="accent5" accent6="accent6" hlink="hlink" folHlink="folHlink"/>
+  <p:notesStyle>
+    <a:lvl1pPr marL="0" algn="l" defTabSz="457200" rtl="0" eaLnBrk="1" latinLnBrk="0" hangingPunct="1">
+      <a:defRPr sz="1200" kern="1200">
+        <a:solidFill>
+          <a:schemeClr val="tx1"/>
+        </a:solidFill>
+        <a:latin typeface="+mn-lt"/>
+        <a:ea typeface="+mn-ea"/>
+        <a:cs typeface="+mn-cs"/>
+      </a:defRPr>
+    </a:lvl1pPr>
+    <a:lvl2pPr marL="457200" algn="l" defTabSz="457200" rtl="0" eaLnBrk="1" latinLnBrk="0" hangingPunct="1">
+      <a:defRPr sz="1200" kern="1200">
+        <a:solidFill>
+          <a:schemeClr val="tx1"/>
+        </a:solidFill>
+        <a:latin typeface="+mn-lt"/>
+        <a:ea typeface="+mn-ea"/>
+        <a:cs typeface="+mn-cs"/>
+      </a:defRPr>
+    </a:lvl2pPr>
+    <a:lvl3pPr marL="914400" algn="l" defTabSz="457200" rtl="0" eaLnBrk="1" latinLnBrk="0" hangingPunct="1">
+      <a:defRPr sz="1200" kern="1200">
+        <a:solidFill>
+          <a:schemeClr val="tx1"/>
+        </a:solidFill>
+        <a:latin typeface="+mn-lt"/>
+        <a:ea typeface="+mn-ea"/>
+        <a:cs typeface="+mn-cs"/>
+      </a:defRPr>
+    </a:lvl3pPr>
+    <a:lvl4pPr marL="1371600" algn="l" defTabSz="457200" rtl="0" eaLnBrk="1" latinLnBrk="0" hangingPunct="1">
+      <a:defRPr sz="1200" kern="1200">
+        <a:solidFill>
+          <a:schemeClr val="tx1"/>
+        </a:solidFill>
+        <a:latin typeface="+mn-lt"/>
+        <a:ea typeface="+mn-ea"/>
+        <a:cs typeface="+mn-cs"/>
+      </a:defRPr>
+    </a:lvl4pPr>
+    <a:lvl5pPr marL="1828800" algn="l" defTabSz="457200" rtl="0" eaLnBrk="1" latinLnBrk="0" hangingPunct="1">
+      <a:defRPr sz="1200" kern="1200">
+        <a:solidFill>
+          <a:schemeClr val="tx1"/>
+        </a:solidFill>
+        <a:latin typeface="+mn-lt"/>
+        <a:ea typeface="+mn-ea"/>
+        <a:cs typeface="+mn-cs"/>
+      </a:defRPr>
+    </a:lvl5pPr>
+    <a:lvl6pPr marL="2286000" algn="l" defTabSz="457200" rtl="0" eaLnBrk="1" latinLnBrk="0" hangingPunct="1">
+      <a:defRPr sz="1200" kern="1200">
+        <a:solidFill>
+          <a:schemeClr val="tx1"/>
+        </a:solidFill>
+        <a:latin typeface="+mn-lt"/>
+        <a:ea typeface="+mn-ea"/>
+        <a:cs typeface="+mn-cs"/>
+      </a:defRPr>
+    </a:lvl6pPr>
+    <a:lvl7pPr marL="2743200" algn="l" defTabSz="457200" rtl="0" eaLnBrk="1" latinLnBrk="0" hangingPunct="1">
+      <a:defRPr sz="1200" kern="1200">
+        <a:solidFill>
+          <a:schemeClr val="tx1"/>
+        </a:solidFill>
+        <a:latin typeface="+mn-lt"/>
+        <a:ea typeface="+mn-ea"/>
+        <a:cs typeface="+mn-cs"/>
+      </a:defRPr>
+    </a:lvl7pPr>
+    <a:lvl8pPr marL="3200400" algn="l" defTabSz="457200" rtl="0" eaLnBrk="1" latinLnBrk="0" hangingPunct="1">
+      <a:defRPr sz="1200" kern="1200">
+        <a:solidFill>
+          <a:schemeClr val="tx1"/>
+        </a:solidFill>
+        <a:latin typeface="+mn-lt"/>
+        <a:ea typeface="+mn-ea"/>
+        <a:cs typeface="+mn-cs"/>
+      </a:defRPr>
+    </a:lvl8pPr>
+    <a:lvl9pPr marL="3657600" algn="l" defTabSz="457200" rtl="0" eaLnBrk="1" latinLnBrk="0" hangingPunct="1">
+      <a:defRPr sz="1200" kern="1200">
+        <a:solidFill>
+          <a:schemeClr val="tx1"/>
+        </a:solidFill>
+        <a:latin typeface="+mn-lt"/>
+        <a:ea typeface="+mn-ea"/>
+        <a:cs typeface="+mn-cs"/>
+      </a:defRPr>
+    </a:lvl9pPr>
+  </p:notesStyle>
+</p:notesMaster>
+</file>
+
+<file path=ppt/notesSlides/notesSlide1.xml><?xml version="1.0" encoding="utf-8"?>
+<p:notes xmlns:a="http://schemas.openxmlformats.org/drawingml/2006/main" xmlns:p="http://schemas.openxmlformats.org/presentationml/2006/main" xmlns:r="http://schemas.openxmlformats.org/officeDocument/2006/relationships">
+  <p:cSld>
+    <p:spTree>
+      <p:nvGrpSpPr>
+        <p:cNvPr id="1" name=""/>
+        <p:cNvGrpSpPr/>
+        <p:nvPr/>
+      </p:nvGrpSpPr>
+      <p:grpSpPr>
+        <a:xfrm>
+          <a:off x="0" y="0"/>
+          <a:ext cx="0" cy="0"/>
+          <a:chOff x="0" y="0"/>
+          <a:chExt cx="0" cy="0"/>
+        </a:xfrm>
+      </p:grpSpPr>
+      <p:sp>
+        <p:nvSpPr>
+          <p:cNvPr id="2" name="Slide Image Placeholder 1"/>
+          <p:cNvSpPr>
+            <a:spLocks noGrp="1"/>
+          </p:cNvSpPr>
+          <p:nvPr>
+            <p:ph type="sldImg" idx="2"/>
+          </p:nvPr>
+        </p:nvSpPr>
+        <p:spPr/>
+      </p:sp>
+      <p:sp>
+        <p:nvSpPr>
+          <p:cNvPr id="3" name="Notes Placeholder 2"/>
+          <p:cNvSpPr>
+            <a:spLocks noGrp="1"/>
+          </p:cNvSpPr>
+          <p:nvPr>
+            <p:ph type="body" idx="3" sz="quarter"/>
+          </p:nvPr>
+        </p:nvSpPr>
+        <p:spPr/>
+        <p:txBody>
+          <a:bodyPr/>
+          <a:lstStyle/>
+          <a:p>
+            <a:r>
+              <a:t>Setting: relational tables with typed columns</a:t>
+            </a:r>
+          </a:p>
+          <a:p>
+            <a:r>
+              <a:t>Key idea: schema + queries for filtering and joins</a:t>
+            </a:r>
+          </a:p>
+          <a:p>
+            <a:r>
+              <a:t>Fits structured datasets with stable attributes</a:t>
+            </a:r>
+          </a:p>
+        </p:txBody>
+      </p:sp>
+      <p:sp>
+        <p:nvSpPr>
+          <p:cNvPr id="4" name="Slide Number Placeholder 3"/>
+          <p:cNvSpPr>
+            <a:spLocks noGrp="1"/>
+          </p:cNvSpPr>
+          <p:nvPr>
+            <p:ph type="sldNum" idx="5" sz="quarter"/>
+          </p:nvPr>
+        </p:nvSpPr>
+        <p:spPr/>
+      </p:sp>
+    </p:spTree>
+  </p:cSld>
+  <p:clrMapOvr>
+    <a:masterClrMapping/>
+  </p:clrMapOvr>
+</p:notes>
+</file>
+
+<file path=ppt/notesSlides/notesSlide2.xml><?xml version="1.0" encoding="utf-8"?>
+<p:notes xmlns:a="http://schemas.openxmlformats.org/drawingml/2006/main" xmlns:p="http://schemas.openxmlformats.org/presentationml/2006/main" xmlns:r="http://schemas.openxmlformats.org/officeDocument/2006/relationships">
+  <p:cSld>
+    <p:spTree>
+      <p:nvGrpSpPr>
+        <p:cNvPr id="1" name=""/>
+        <p:cNvGrpSpPr/>
+        <p:nvPr/>
+      </p:nvGrpSpPr>
+      <p:grpSpPr>
+        <a:xfrm>
+          <a:off x="0" y="0"/>
+          <a:ext cx="0" cy="0"/>
+          <a:chOff x="0" y="0"/>
+          <a:chExt cx="0" cy="0"/>
+        </a:xfrm>
+      </p:grpSpPr>
+      <p:sp>
+        <p:nvSpPr>
+          <p:cNvPr id="2" name="Slide Image Placeholder 1"/>
+          <p:cNvSpPr>
+            <a:spLocks noGrp="1"/>
+          </p:cNvSpPr>
+          <p:nvPr>
+            <p:ph type="sldImg" idx="2"/>
+          </p:nvPr>
+        </p:nvSpPr>
+        <p:spPr/>
+      </p:sp>
+      <p:sp>
+        <p:nvSpPr>
+          <p:cNvPr id="3" name="Notes Placeholder 2"/>
+          <p:cNvSpPr>
+            <a:spLocks noGrp="1"/>
+          </p:cNvSpPr>
+          <p:nvPr>
+            <p:ph type="body" idx="3" sz="quarter"/>
+          </p:nvPr>
+        </p:nvSpPr>
+        <p:spPr/>
+        <p:txBody>
+          <a:bodyPr/>
+          <a:lstStyle/>
+          <a:p>
+            <a:r>
+              <a:t>Setting: hierarchical binary store for arrays</a:t>
+            </a:r>
+          </a:p>
+          <a:p>
+            <a:r>
+              <a:t>Key idea: efficient read/write for large numeric data</a:t>
+            </a:r>
+          </a:p>
+          <a:p>
+            <a:r>
+              <a:t>Common in scientific and ML feature pipelines</a:t>
+            </a:r>
+          </a:p>
+        </p:txBody>
+      </p:sp>
+      <p:sp>
+        <p:nvSpPr>
+          <p:cNvPr id="4" name="Slide Number Placeholder 3"/>
+          <p:cNvSpPr>
+            <a:spLocks noGrp="1"/>
+          </p:cNvSpPr>
+          <p:nvPr>
+            <p:ph type="sldNum" idx="5" sz="quarter"/>
+          </p:nvPr>
+        </p:nvSpPr>
+        <p:spPr/>
+      </p:sp>
+    </p:spTree>
+  </p:cSld>
+  <p:clrMapOvr>
+    <a:masterClrMapping/>
+  </p:clrMapOvr>
+</p:notes>
 </file>
 
 <file path=ppt/slideLayouts/slideLayout1.xml><?xml version="1.0" encoding="utf-8"?>
@@ -3104,8 +3613,8 @@
         </p:nvSpPr>
         <p:spPr>
           <a:xfrm>
-            <a:off x="548640" y="320040"/>
-            <a:ext cx="11064240" cy="914400"/>
+            <a:off x="548640" y="1828800"/>
+            <a:ext cx="11064240" cy="2743200"/>
           </a:xfrm>
           <a:prstGeom prst="rect">
             <a:avLst/>
@@ -3113,16 +3622,46 @@
           <a:noFill/>
         </p:spPr>
         <p:txBody>
-          <a:bodyPr wrap="none">
-            <a:spAutoFit/>
+          <a:bodyPr wrap="square">
+            <a:noAutofit/>
           </a:bodyPr>
           <a:lstStyle/>
           <a:p>
-            <a:pPr>
-              <a:defRPr sz="3200" b="1"/>
+            <a:pPr algn="ctr">
+              <a:lnSpc>
+                <a:spcPts val="2200"/>
+              </a:lnSpc>
+              <a:spcAft>
+                <a:spcPts val="400"/>
+              </a:spcAft>
             </a:pPr>
             <a:r>
+              <a:rPr sz="4000" b="1">
+                <a:solidFill>
+                  <a:srgbClr val="1A1A2E"/>
+                </a:solidFill>
+                <a:latin typeface="Calibri"/>
+              </a:rPr>
               <a:t>Chapter 1 — Dataset formats</a:t>
+            </a:r>
+          </a:p>
+          <a:p>
+            <a:pPr algn="ctr">
+              <a:lnSpc>
+                <a:spcPts val="2200"/>
+              </a:lnSpc>
+              <a:spcBef>
+                <a:spcPts val="1400"/>
+              </a:spcBef>
+            </a:pPr>
+            <a:r>
+              <a:rPr sz="2600" b="0">
+                <a:solidFill>
+                  <a:srgbClr val="333333"/>
+                </a:solidFill>
+                <a:latin typeface="Calibri"/>
+              </a:rPr>
+              <a:t>Match storage formats to structure, volume, and tools</a:t>
             </a:r>
           </a:p>
         </p:txBody>
@@ -3135,8 +3674,8 @@
         </p:nvSpPr>
         <p:spPr>
           <a:xfrm>
-            <a:off x="731520" y="1280160"/>
-            <a:ext cx="10515600" cy="5029200"/>
+            <a:off x="548640" y="6355080"/>
+            <a:ext cx="11064240" cy="320040"/>
           </a:xfrm>
           <a:prstGeom prst="rect">
             <a:avLst/>
@@ -3145,15 +3684,23 @@
         </p:spPr>
         <p:txBody>
           <a:bodyPr wrap="square">
-            <a:spAutoFit/>
+            <a:noAutofit/>
           </a:bodyPr>
           <a:lstStyle/>
           <a:p>
-            <a:pPr>
-              <a:defRPr sz="2000"/>
+            <a:pPr algn="r">
+              <a:lnSpc>
+                <a:spcPts val="2200"/>
+              </a:lnSpc>
+              <a:defRPr sz="1000" b="0">
+                <a:solidFill>
+                  <a:srgbClr val="666666"/>
+                </a:solidFill>
+                <a:latin typeface="Calibri"/>
+              </a:defRPr>
             </a:pPr>
             <a:r>
-              <a:t>Match storage formats to structure, volume, and tools</a:t>
+              <a:t>Chapter 1 — Dataset Formats</a:t>
             </a:r>
           </a:p>
         </p:txBody>
@@ -3184,8 +3731,8 @@
         </p:nvSpPr>
         <p:spPr>
           <a:xfrm>
-            <a:off x="548640" y="320040"/>
-            <a:ext cx="11064240" cy="914400"/>
+            <a:off x="548640" y="411480"/>
+            <a:ext cx="11064240" cy="777240"/>
           </a:xfrm>
           <a:prstGeom prst="rect">
             <a:avLst/>
@@ -3193,15 +3740,23 @@
           <a:noFill/>
         </p:spPr>
         <p:txBody>
-          <a:bodyPr wrap="none">
-            <a:spAutoFit/>
+          <a:bodyPr wrap="square">
+            <a:noAutofit/>
           </a:bodyPr>
           <a:lstStyle/>
           <a:p>
             <a:pPr>
-              <a:defRPr sz="3200" b="1"/>
+              <a:lnSpc>
+                <a:spcPts val="2200"/>
+              </a:lnSpc>
             </a:pPr>
             <a:r>
+              <a:rPr sz="2800" b="1">
+                <a:solidFill>
+                  <a:srgbClr val="1A1A2E"/>
+                </a:solidFill>
+                <a:latin typeface="Calibri"/>
+              </a:rPr>
               <a:t>Learning objectives</a:t>
             </a:r>
           </a:p>
@@ -3215,8 +3770,8 @@
         </p:nvSpPr>
         <p:spPr>
           <a:xfrm>
-            <a:off x="731520" y="1280160"/>
-            <a:ext cx="10515600" cy="5029200"/>
+            <a:off x="548640" y="1234440"/>
+            <a:ext cx="11064240" cy="4937760"/>
           </a:xfrm>
           <a:prstGeom prst="rect">
             <a:avLst/>
@@ -3225,31 +3780,122 @@
         </p:spPr>
         <p:txBody>
           <a:bodyPr wrap="square">
-            <a:spAutoFit/>
+            <a:noAutofit/>
           </a:bodyPr>
           <a:lstStyle/>
           <a:p>
             <a:pPr>
-              <a:defRPr sz="2000"/>
+              <a:lnSpc>
+                <a:spcPts val="2200"/>
+              </a:lnSpc>
+              <a:spcAft>
+                <a:spcPts val="1000"/>
+              </a:spcAft>
             </a:pPr>
             <a:r>
-              <a:t>Name common formats for tabular, hierarchical, and geospatial data</a:t>
+              <a:rPr sz="2000" b="0">
+                <a:solidFill>
+                  <a:srgbClr val="333333"/>
+                </a:solidFill>
+                <a:latin typeface="Calibri"/>
+              </a:rPr>
+              <a:t>• Name common formats for tabular, hierarchical, and</a:t>
             </a:r>
           </a:p>
           <a:p>
             <a:pPr>
-              <a:defRPr sz="2000"/>
+              <a:lnSpc>
+                <a:spcPts val="2200"/>
+              </a:lnSpc>
+              <a:spcAft>
+                <a:spcPts val="1000"/>
+              </a:spcAft>
             </a:pPr>
             <a:r>
-              <a:t>Explain when CSV, SQL, HDF5, or GeoJSON is a fit</a:t>
+              <a:rPr sz="2000" b="0">
+                <a:solidFill>
+                  <a:srgbClr val="333333"/>
+                </a:solidFill>
+                <a:latin typeface="Calibri"/>
+              </a:rPr>
+              <a:t>      geospatial data</a:t>
             </a:r>
           </a:p>
           <a:p>
             <a:pPr>
-              <a:defRPr sz="2000"/>
+              <a:lnSpc>
+                <a:spcPts val="2200"/>
+              </a:lnSpc>
+              <a:spcAft>
+                <a:spcPts val="1000"/>
+              </a:spcAft>
             </a:pPr>
             <a:r>
-              <a:t>Link format choice to downstream tooling</a:t>
+              <a:rPr sz="2000" b="0">
+                <a:solidFill>
+                  <a:srgbClr val="333333"/>
+                </a:solidFill>
+                <a:latin typeface="Calibri"/>
+              </a:rPr>
+              <a:t>• Explain when CSV, SQL, HDF5, or GeoJSON is a fit</a:t>
+            </a:r>
+          </a:p>
+          <a:p>
+            <a:pPr>
+              <a:lnSpc>
+                <a:spcPts val="2200"/>
+              </a:lnSpc>
+              <a:spcAft>
+                <a:spcPts val="1000"/>
+              </a:spcAft>
+            </a:pPr>
+            <a:r>
+              <a:rPr sz="2000" b="0">
+                <a:solidFill>
+                  <a:srgbClr val="333333"/>
+                </a:solidFill>
+                <a:latin typeface="Calibri"/>
+              </a:rPr>
+              <a:t>• Link format choice to downstream tooling</a:t>
+            </a:r>
+          </a:p>
+        </p:txBody>
+      </p:sp>
+      <p:sp>
+        <p:nvSpPr>
+          <p:cNvPr id="4" name="TextBox 3"/>
+          <p:cNvSpPr txBox="1"/>
+          <p:nvPr/>
+        </p:nvSpPr>
+        <p:spPr>
+          <a:xfrm>
+            <a:off x="548640" y="6355080"/>
+            <a:ext cx="11064240" cy="320040"/>
+          </a:xfrm>
+          <a:prstGeom prst="rect">
+            <a:avLst/>
+          </a:prstGeom>
+          <a:noFill/>
+        </p:spPr>
+        <p:txBody>
+          <a:bodyPr wrap="square">
+            <a:noAutofit/>
+          </a:bodyPr>
+          <a:lstStyle/>
+          <a:p>
+            <a:pPr algn="r">
+              <a:lnSpc>
+                <a:spcPts val="2200"/>
+              </a:lnSpc>
+              <a:defRPr sz="1000" b="0">
+                <a:solidFill>
+                  <a:srgbClr val="666666"/>
+                </a:solidFill>
+                <a:latin typeface="Calibri"/>
+              </a:defRPr>
+            </a:pPr>
+            <a:r>
+              <a:t>Chapter 1 — Dataset Formats</a:t>
             </a:r>
           </a:p>
         </p:txBody>
@@ -3280,8 +3926,8 @@
         </p:nvSpPr>
         <p:spPr>
           <a:xfrm>
-            <a:off x="548640" y="320040"/>
-            <a:ext cx="11064240" cy="914400"/>
+            <a:off x="548640" y="411480"/>
+            <a:ext cx="11064240" cy="777240"/>
           </a:xfrm>
           <a:prstGeom prst="rect">
             <a:avLst/>
@@ -3289,15 +3935,23 @@
           <a:noFill/>
         </p:spPr>
         <p:txBody>
-          <a:bodyPr wrap="none">
-            <a:spAutoFit/>
+          <a:bodyPr wrap="square">
+            <a:noAutofit/>
           </a:bodyPr>
           <a:lstStyle/>
           <a:p>
             <a:pPr>
-              <a:defRPr sz="3200" b="1"/>
+              <a:lnSpc>
+                <a:spcPts val="2200"/>
+              </a:lnSpc>
             </a:pPr>
             <a:r>
+              <a:rPr sz="2800" b="1">
+                <a:solidFill>
+                  <a:srgbClr val="1A1A2E"/>
+                </a:solidFill>
+                <a:latin typeface="Calibri"/>
+              </a:rPr>
               <a:t>Why format matters</a:t>
             </a:r>
           </a:p>
@@ -3311,8 +3965,8 @@
         </p:nvSpPr>
         <p:spPr>
           <a:xfrm>
-            <a:off x="731520" y="1280160"/>
-            <a:ext cx="10515600" cy="5029200"/>
+            <a:off x="548640" y="1234440"/>
+            <a:ext cx="11064240" cy="4937760"/>
           </a:xfrm>
           <a:prstGeom prst="rect">
             <a:avLst/>
@@ -3321,39 +3975,122 @@
         </p:spPr>
         <p:txBody>
           <a:bodyPr wrap="square">
-            <a:spAutoFit/>
+            <a:noAutofit/>
           </a:bodyPr>
           <a:lstStyle/>
           <a:p>
             <a:pPr>
-              <a:defRPr sz="2000"/>
+              <a:lnSpc>
+                <a:spcPts val="2200"/>
+              </a:lnSpc>
+              <a:spcAft>
+                <a:spcPts val="1000"/>
+              </a:spcAft>
             </a:pPr>
             <a:r>
-              <a:t>Format is how structure is serialized on disk</a:t>
+              <a:rPr sz="2000" b="0">
+                <a:solidFill>
+                  <a:srgbClr val="333333"/>
+                </a:solidFill>
+                <a:latin typeface="Calibri"/>
+              </a:rPr>
+              <a:t>• Format is how structure is serialized on disk</a:t>
             </a:r>
           </a:p>
           <a:p>
             <a:pPr>
-              <a:defRPr sz="2000"/>
+              <a:lnSpc>
+                <a:spcPts val="2200"/>
+              </a:lnSpc>
+              <a:spcAft>
+                <a:spcPts val="1000"/>
+              </a:spcAft>
             </a:pPr>
             <a:r>
-              <a:t>Wrong format creates friction in the pipeline</a:t>
+              <a:rPr sz="2000" b="0">
+                <a:solidFill>
+                  <a:srgbClr val="333333"/>
+                </a:solidFill>
+                <a:latin typeface="Calibri"/>
+              </a:rPr>
+              <a:t>• Wrong format creates friction in the pipeline</a:t>
             </a:r>
           </a:p>
           <a:p>
             <a:pPr>
-              <a:defRPr sz="2000"/>
+              <a:lnSpc>
+                <a:spcPts val="2200"/>
+              </a:lnSpc>
+              <a:spcAft>
+                <a:spcPts val="1000"/>
+              </a:spcAft>
             </a:pPr>
             <a:r>
-              <a:t>Match format to structure, volume, and tools</a:t>
+              <a:rPr sz="2000" b="0">
+                <a:solidFill>
+                  <a:srgbClr val="333333"/>
+                </a:solidFill>
+                <a:latin typeface="Calibri"/>
+              </a:rPr>
+              <a:t>• Match format to structure, volume, and tools</a:t>
             </a:r>
           </a:p>
           <a:p>
             <a:pPr>
-              <a:defRPr sz="2000"/>
+              <a:lnSpc>
+                <a:spcPts val="2200"/>
+              </a:lnSpc>
+              <a:spcAft>
+                <a:spcPts val="1000"/>
+              </a:spcAft>
             </a:pPr>
             <a:r>
-              <a:t>Complements the type taxonomy from the previous clip</a:t>
+              <a:rPr sz="2000" b="0">
+                <a:solidFill>
+                  <a:srgbClr val="333333"/>
+                </a:solidFill>
+                <a:latin typeface="Calibri"/>
+              </a:rPr>
+              <a:t>• Complements the type taxonomy from the previous clip</a:t>
+            </a:r>
+          </a:p>
+        </p:txBody>
+      </p:sp>
+      <p:sp>
+        <p:nvSpPr>
+          <p:cNvPr id="4" name="TextBox 3"/>
+          <p:cNvSpPr txBox="1"/>
+          <p:nvPr/>
+        </p:nvSpPr>
+        <p:spPr>
+          <a:xfrm>
+            <a:off x="548640" y="6355080"/>
+            <a:ext cx="11064240" cy="320040"/>
+          </a:xfrm>
+          <a:prstGeom prst="rect">
+            <a:avLst/>
+          </a:prstGeom>
+          <a:noFill/>
+        </p:spPr>
+        <p:txBody>
+          <a:bodyPr wrap="square">
+            <a:noAutofit/>
+          </a:bodyPr>
+          <a:lstStyle/>
+          <a:p>
+            <a:pPr algn="r">
+              <a:lnSpc>
+                <a:spcPts val="2200"/>
+              </a:lnSpc>
+              <a:defRPr sz="1000" b="0">
+                <a:solidFill>
+                  <a:srgbClr val="666666"/>
+                </a:solidFill>
+                <a:latin typeface="Calibri"/>
+              </a:defRPr>
+            </a:pPr>
+            <a:r>
+              <a:t>Chapter 1 — Dataset Formats</a:t>
             </a:r>
           </a:p>
         </p:txBody>
@@ -3384,8 +4121,8 @@
         </p:nvSpPr>
         <p:spPr>
           <a:xfrm>
-            <a:off x="548640" y="320040"/>
-            <a:ext cx="11064240" cy="914400"/>
+            <a:off x="548640" y="411480"/>
+            <a:ext cx="11064240" cy="777240"/>
           </a:xfrm>
           <a:prstGeom prst="rect">
             <a:avLst/>
@@ -3393,15 +4130,23 @@
           <a:noFill/>
         </p:spPr>
         <p:txBody>
-          <a:bodyPr wrap="none">
-            <a:spAutoFit/>
+          <a:bodyPr wrap="square">
+            <a:noAutofit/>
           </a:bodyPr>
           <a:lstStyle/>
           <a:p>
             <a:pPr>
-              <a:defRPr sz="3200" b="1"/>
+              <a:lnSpc>
+                <a:spcPts val="2200"/>
+              </a:lnSpc>
             </a:pPr>
             <a:r>
+              <a:rPr sz="2800" b="1">
+                <a:solidFill>
+                  <a:srgbClr val="1A1A2E"/>
+                </a:solidFill>
+                <a:latin typeface="Calibri"/>
+              </a:rPr>
               <a:t>Common formats at a glance</a:t>
             </a:r>
           </a:p>
@@ -3415,8 +4160,8 @@
         </p:nvSpPr>
         <p:spPr>
           <a:xfrm>
-            <a:off x="731520" y="1280160"/>
-            <a:ext cx="10515600" cy="5029200"/>
+            <a:off x="548640" y="1234440"/>
+            <a:ext cx="11064240" cy="4937760"/>
           </a:xfrm>
           <a:prstGeom prst="rect">
             <a:avLst/>
@@ -3425,39 +4170,194 @@
         </p:spPr>
         <p:txBody>
           <a:bodyPr wrap="square">
-            <a:spAutoFit/>
+            <a:noAutofit/>
           </a:bodyPr>
           <a:lstStyle/>
           <a:p>
             <a:pPr>
-              <a:defRPr sz="2000"/>
+              <a:lnSpc>
+                <a:spcPts val="2200"/>
+              </a:lnSpc>
+              <a:spcAft>
+                <a:spcPts val="1000"/>
+              </a:spcAft>
             </a:pPr>
             <a:r>
-              <a:t>**CSV** — simple tabular exchange</a:t>
+              <a:rPr sz="2000" b="0">
+                <a:solidFill>
+                  <a:srgbClr val="333333"/>
+                </a:solidFill>
+                <a:latin typeface="Calibri"/>
+              </a:rPr>
+              <a:t>• </a:t>
+            </a:r>
+            <a:r>
+              <a:rPr sz="2000" b="1">
+                <a:solidFill>
+                  <a:srgbClr val="333333"/>
+                </a:solidFill>
+                <a:latin typeface="Calibri"/>
+              </a:rPr>
+              <a:t>CSV</a:t>
+            </a:r>
+            <a:r>
+              <a:rPr sz="2000" b="0">
+                <a:solidFill>
+                  <a:srgbClr val="333333"/>
+                </a:solidFill>
+                <a:latin typeface="Calibri"/>
+              </a:rPr>
+              <a:t> — simple tabular exchange</a:t>
             </a:r>
           </a:p>
           <a:p>
             <a:pPr>
-              <a:defRPr sz="2000"/>
+              <a:lnSpc>
+                <a:spcPts val="2200"/>
+              </a:lnSpc>
+              <a:spcAft>
+                <a:spcPts val="1000"/>
+              </a:spcAft>
             </a:pPr>
             <a:r>
-              <a:t>**SQL tables** — queryable structured stores</a:t>
+              <a:rPr sz="2000" b="0">
+                <a:solidFill>
+                  <a:srgbClr val="333333"/>
+                </a:solidFill>
+                <a:latin typeface="Calibri"/>
+              </a:rPr>
+              <a:t>• </a:t>
+            </a:r>
+            <a:r>
+              <a:rPr sz="2000" b="1">
+                <a:solidFill>
+                  <a:srgbClr val="333333"/>
+                </a:solidFill>
+                <a:latin typeface="Calibri"/>
+              </a:rPr>
+              <a:t>SQL tables</a:t>
+            </a:r>
+            <a:r>
+              <a:rPr sz="2000" b="0">
+                <a:solidFill>
+                  <a:srgbClr val="333333"/>
+                </a:solidFill>
+                <a:latin typeface="Calibri"/>
+              </a:rPr>
+              <a:t> — queryable structured stores</a:t>
             </a:r>
           </a:p>
           <a:p>
             <a:pPr>
-              <a:defRPr sz="2000"/>
+              <a:lnSpc>
+                <a:spcPts val="2200"/>
+              </a:lnSpc>
+              <a:spcAft>
+                <a:spcPts val="1000"/>
+              </a:spcAft>
             </a:pPr>
             <a:r>
-              <a:t>**JSON / GeoJSON** — nested or spatial features</a:t>
+              <a:rPr sz="2000" b="0">
+                <a:solidFill>
+                  <a:srgbClr val="333333"/>
+                </a:solidFill>
+                <a:latin typeface="Calibri"/>
+              </a:rPr>
+              <a:t>• </a:t>
+            </a:r>
+            <a:r>
+              <a:rPr sz="2000" b="1">
+                <a:solidFill>
+                  <a:srgbClr val="333333"/>
+                </a:solidFill>
+                <a:latin typeface="Calibri"/>
+              </a:rPr>
+              <a:t>JSON / GeoJSON</a:t>
+            </a:r>
+            <a:r>
+              <a:rPr sz="2000" b="0">
+                <a:solidFill>
+                  <a:srgbClr val="333333"/>
+                </a:solidFill>
+                <a:latin typeface="Calibri"/>
+              </a:rPr>
+              <a:t> — nested or spatial features</a:t>
             </a:r>
           </a:p>
           <a:p>
             <a:pPr>
-              <a:defRPr sz="2000"/>
+              <a:lnSpc>
+                <a:spcPts val="2200"/>
+              </a:lnSpc>
+              <a:spcAft>
+                <a:spcPts val="1000"/>
+              </a:spcAft>
             </a:pPr>
             <a:r>
-              <a:t>**HDF5** — large scientific / array datasets</a:t>
+              <a:rPr sz="2000" b="0">
+                <a:solidFill>
+                  <a:srgbClr val="333333"/>
+                </a:solidFill>
+                <a:latin typeface="Calibri"/>
+              </a:rPr>
+              <a:t>• </a:t>
+            </a:r>
+            <a:r>
+              <a:rPr sz="2000" b="1">
+                <a:solidFill>
+                  <a:srgbClr val="333333"/>
+                </a:solidFill>
+                <a:latin typeface="Calibri"/>
+              </a:rPr>
+              <a:t>HDF5</a:t>
+            </a:r>
+            <a:r>
+              <a:rPr sz="2000" b="0">
+                <a:solidFill>
+                  <a:srgbClr val="333333"/>
+                </a:solidFill>
+                <a:latin typeface="Calibri"/>
+              </a:rPr>
+              <a:t> — large scientific / array datasets</a:t>
+            </a:r>
+          </a:p>
+        </p:txBody>
+      </p:sp>
+      <p:sp>
+        <p:nvSpPr>
+          <p:cNvPr id="4" name="TextBox 3"/>
+          <p:cNvSpPr txBox="1"/>
+          <p:nvPr/>
+        </p:nvSpPr>
+        <p:spPr>
+          <a:xfrm>
+            <a:off x="548640" y="6355080"/>
+            <a:ext cx="11064240" cy="320040"/>
+          </a:xfrm>
+          <a:prstGeom prst="rect">
+            <a:avLst/>
+          </a:prstGeom>
+          <a:noFill/>
+        </p:spPr>
+        <p:txBody>
+          <a:bodyPr wrap="square">
+            <a:noAutofit/>
+          </a:bodyPr>
+          <a:lstStyle/>
+          <a:p>
+            <a:pPr algn="r">
+              <a:lnSpc>
+                <a:spcPts val="2200"/>
+              </a:lnSpc>
+              <a:defRPr sz="1000" b="0">
+                <a:solidFill>
+                  <a:srgbClr val="666666"/>
+                </a:solidFill>
+                <a:latin typeface="Calibri"/>
+              </a:defRPr>
+            </a:pPr>
+            <a:r>
+              <a:t>Chapter 1 — Dataset Formats</a:t>
             </a:r>
           </a:p>
         </p:txBody>
@@ -3488,8 +4388,8 @@
         </p:nvSpPr>
         <p:spPr>
           <a:xfrm>
-            <a:off x="548640" y="320040"/>
-            <a:ext cx="11064240" cy="914400"/>
+            <a:off x="548640" y="411480"/>
+            <a:ext cx="11064240" cy="777240"/>
           </a:xfrm>
           <a:prstGeom prst="rect">
             <a:avLst/>
@@ -3497,15 +4397,23 @@
           <a:noFill/>
         </p:spPr>
         <p:txBody>
-          <a:bodyPr wrap="none">
-            <a:spAutoFit/>
+          <a:bodyPr wrap="square">
+            <a:noAutofit/>
           </a:bodyPr>
           <a:lstStyle/>
           <a:p>
             <a:pPr>
-              <a:defRPr sz="3200" b="1"/>
+              <a:lnSpc>
+                <a:spcPts val="2200"/>
+              </a:lnSpc>
             </a:pPr>
             <a:r>
+              <a:rPr sz="2800" b="1">
+                <a:solidFill>
+                  <a:srgbClr val="1A1A2E"/>
+                </a:solidFill>
+                <a:latin typeface="Calibri"/>
+              </a:rPr>
               <a:t>Example 1.8 — SQL format</a:t>
             </a:r>
           </a:p>
@@ -3519,8 +4427,52 @@
         </p:nvSpPr>
         <p:spPr>
           <a:xfrm>
-            <a:off x="731520" y="1280160"/>
-            <a:ext cx="10515600" cy="5029200"/>
+            <a:off x="548640" y="1051560"/>
+            <a:ext cx="11064240" cy="914400"/>
+          </a:xfrm>
+          <a:prstGeom prst="rect">
+            <a:avLst/>
+          </a:prstGeom>
+          <a:solidFill>
+            <a:srgbClr val="F4F4F4"/>
+          </a:solidFill>
+        </p:spPr>
+        <p:txBody>
+          <a:bodyPr wrap="square">
+            <a:noAutofit/>
+          </a:bodyPr>
+          <a:lstStyle/>
+          <a:p>
+            <a:pPr>
+              <a:lnSpc>
+                <a:spcPts val="2200"/>
+              </a:lnSpc>
+              <a:spcAft>
+                <a:spcPts val="200"/>
+              </a:spcAft>
+            </a:pPr>
+            <a:r>
+              <a:rPr sz="2000" b="0">
+                <a:solidFill>
+                  <a:srgbClr val="333333"/>
+                </a:solidFill>
+                <a:latin typeface="Consolas"/>
+              </a:rPr>
+              <a:t>$ cd modules/chapter1/example8/ &amp;&amp; bash run.sh</a:t>
+            </a:r>
+          </a:p>
+        </p:txBody>
+      </p:sp>
+      <p:sp>
+        <p:nvSpPr>
+          <p:cNvPr id="4" name="TextBox 3"/>
+          <p:cNvSpPr txBox="1"/>
+          <p:nvPr/>
+        </p:nvSpPr>
+        <p:spPr>
+          <a:xfrm>
+            <a:off x="548640" y="6355080"/>
+            <a:ext cx="11064240" cy="320040"/>
           </a:xfrm>
           <a:prstGeom prst="rect">
             <a:avLst/>
@@ -3529,39 +4481,23 @@
         </p:spPr>
         <p:txBody>
           <a:bodyPr wrap="square">
-            <a:spAutoFit/>
+            <a:noAutofit/>
           </a:bodyPr>
           <a:lstStyle/>
           <a:p>
-            <a:pPr>
-              <a:defRPr sz="2000"/>
+            <a:pPr algn="r">
+              <a:lnSpc>
+                <a:spcPts val="2200"/>
+              </a:lnSpc>
+              <a:defRPr sz="1000" b="0">
+                <a:solidFill>
+                  <a:srgbClr val="666666"/>
+                </a:solidFill>
+                <a:latin typeface="Calibri"/>
+              </a:defRPr>
             </a:pPr>
             <a:r>
-              <a:t>Setting: relational tables with typed columns</a:t>
-            </a:r>
-          </a:p>
-          <a:p>
-            <a:pPr>
-              <a:defRPr sz="2000"/>
-            </a:pPr>
-            <a:r>
-              <a:t>Key idea: schema + queries for filtering and joins</a:t>
-            </a:r>
-          </a:p>
-          <a:p>
-            <a:pPr>
-              <a:defRPr sz="2000"/>
-            </a:pPr>
-            <a:r>
-              <a:t>Fits structured datasets with stable attributes</a:t>
-            </a:r>
-          </a:p>
-          <a:p>
-            <a:pPr>
-              <a:defRPr sz="2000"/>
-            </a:pPr>
-            <a:r>
-              <a:t>Try it: `modules/chapter1/example8/`</a:t>
+              <a:t>Chapter 1 — Dataset Formats</a:t>
             </a:r>
           </a:p>
         </p:txBody>
@@ -3592,8 +4528,8 @@
         </p:nvSpPr>
         <p:spPr>
           <a:xfrm>
-            <a:off x="548640" y="320040"/>
-            <a:ext cx="11064240" cy="914400"/>
+            <a:off x="548640" y="411480"/>
+            <a:ext cx="11064240" cy="777240"/>
           </a:xfrm>
           <a:prstGeom prst="rect">
             <a:avLst/>
@@ -3601,15 +4537,23 @@
           <a:noFill/>
         </p:spPr>
         <p:txBody>
-          <a:bodyPr wrap="none">
-            <a:spAutoFit/>
+          <a:bodyPr wrap="square">
+            <a:noAutofit/>
           </a:bodyPr>
           <a:lstStyle/>
           <a:p>
             <a:pPr>
-              <a:defRPr sz="3200" b="1"/>
+              <a:lnSpc>
+                <a:spcPts val="2200"/>
+              </a:lnSpc>
             </a:pPr>
             <a:r>
+              <a:rPr sz="2800" b="1">
+                <a:solidFill>
+                  <a:srgbClr val="1A1A2E"/>
+                </a:solidFill>
+                <a:latin typeface="Calibri"/>
+              </a:rPr>
               <a:t>Example 1.9 — HDF5</a:t>
             </a:r>
           </a:p>
@@ -3623,8 +4567,52 @@
         </p:nvSpPr>
         <p:spPr>
           <a:xfrm>
-            <a:off x="731520" y="1280160"/>
-            <a:ext cx="10515600" cy="5029200"/>
+            <a:off x="548640" y="1051560"/>
+            <a:ext cx="11064240" cy="914400"/>
+          </a:xfrm>
+          <a:prstGeom prst="rect">
+            <a:avLst/>
+          </a:prstGeom>
+          <a:solidFill>
+            <a:srgbClr val="F4F4F4"/>
+          </a:solidFill>
+        </p:spPr>
+        <p:txBody>
+          <a:bodyPr wrap="square">
+            <a:noAutofit/>
+          </a:bodyPr>
+          <a:lstStyle/>
+          <a:p>
+            <a:pPr>
+              <a:lnSpc>
+                <a:spcPts val="2200"/>
+              </a:lnSpc>
+              <a:spcAft>
+                <a:spcPts val="200"/>
+              </a:spcAft>
+            </a:pPr>
+            <a:r>
+              <a:rPr sz="2000" b="0">
+                <a:solidFill>
+                  <a:srgbClr val="333333"/>
+                </a:solidFill>
+                <a:latin typeface="Consolas"/>
+              </a:rPr>
+              <a:t>$ cd modules/chapter1/example9/ &amp;&amp; bash run.sh</a:t>
+            </a:r>
+          </a:p>
+        </p:txBody>
+      </p:sp>
+      <p:sp>
+        <p:nvSpPr>
+          <p:cNvPr id="4" name="TextBox 3"/>
+          <p:cNvSpPr txBox="1"/>
+          <p:nvPr/>
+        </p:nvSpPr>
+        <p:spPr>
+          <a:xfrm>
+            <a:off x="548640" y="6355080"/>
+            <a:ext cx="11064240" cy="320040"/>
           </a:xfrm>
           <a:prstGeom prst="rect">
             <a:avLst/>
@@ -3633,39 +4621,23 @@
         </p:spPr>
         <p:txBody>
           <a:bodyPr wrap="square">
-            <a:spAutoFit/>
+            <a:noAutofit/>
           </a:bodyPr>
           <a:lstStyle/>
           <a:p>
-            <a:pPr>
-              <a:defRPr sz="2000"/>
+            <a:pPr algn="r">
+              <a:lnSpc>
+                <a:spcPts val="2200"/>
+              </a:lnSpc>
+              <a:defRPr sz="1000" b="0">
+                <a:solidFill>
+                  <a:srgbClr val="666666"/>
+                </a:solidFill>
+                <a:latin typeface="Calibri"/>
+              </a:defRPr>
             </a:pPr>
             <a:r>
-              <a:t>Setting: hierarchical binary store for arrays</a:t>
-            </a:r>
-          </a:p>
-          <a:p>
-            <a:pPr>
-              <a:defRPr sz="2000"/>
-            </a:pPr>
-            <a:r>
-              <a:t>Key idea: efficient read/write for large numeric data</a:t>
-            </a:r>
-          </a:p>
-          <a:p>
-            <a:pPr>
-              <a:defRPr sz="2000"/>
-            </a:pPr>
-            <a:r>
-              <a:t>Common in scientific and ML feature pipelines</a:t>
-            </a:r>
-          </a:p>
-          <a:p>
-            <a:pPr>
-              <a:defRPr sz="2000"/>
-            </a:pPr>
-            <a:r>
-              <a:t>Try it: `modules/chapter1/example9/`</a:t>
+              <a:t>Chapter 1 — Dataset Formats</a:t>
             </a:r>
           </a:p>
         </p:txBody>
@@ -3696,8 +4668,8 @@
         </p:nvSpPr>
         <p:spPr>
           <a:xfrm>
-            <a:off x="548640" y="320040"/>
-            <a:ext cx="11064240" cy="914400"/>
+            <a:off x="548640" y="411480"/>
+            <a:ext cx="11064240" cy="777240"/>
           </a:xfrm>
           <a:prstGeom prst="rect">
             <a:avLst/>
@@ -3705,15 +4677,23 @@
           <a:noFill/>
         </p:spPr>
         <p:txBody>
-          <a:bodyPr wrap="none">
-            <a:spAutoFit/>
+          <a:bodyPr wrap="square">
+            <a:noAutofit/>
           </a:bodyPr>
           <a:lstStyle/>
           <a:p>
             <a:pPr>
-              <a:defRPr sz="3200" b="1"/>
+              <a:lnSpc>
+                <a:spcPts val="2200"/>
+              </a:lnSpc>
             </a:pPr>
             <a:r>
+              <a:rPr sz="2800" b="1">
+                <a:solidFill>
+                  <a:srgbClr val="1A1A2E"/>
+                </a:solidFill>
+                <a:latin typeface="Calibri"/>
+              </a:rPr>
               <a:t>Choosing a format</a:t>
             </a:r>
           </a:p>
@@ -3727,8 +4707,8 @@
         </p:nvSpPr>
         <p:spPr>
           <a:xfrm>
-            <a:off x="731520" y="1280160"/>
-            <a:ext cx="10515600" cy="5029200"/>
+            <a:off x="548640" y="1234440"/>
+            <a:ext cx="11064240" cy="4937760"/>
           </a:xfrm>
           <a:prstGeom prst="rect">
             <a:avLst/>
@@ -3737,39 +4717,141 @@
         </p:spPr>
         <p:txBody>
           <a:bodyPr wrap="square">
-            <a:spAutoFit/>
+            <a:noAutofit/>
           </a:bodyPr>
           <a:lstStyle/>
           <a:p>
             <a:pPr>
-              <a:defRPr sz="2000"/>
+              <a:lnSpc>
+                <a:spcPts val="2200"/>
+              </a:lnSpc>
+              <a:spcAft>
+                <a:spcPts val="1000"/>
+              </a:spcAft>
             </a:pPr>
             <a:r>
-              <a:t>Start from structure (tabular vs nested vs spatial)</a:t>
+              <a:rPr sz="2000" b="0">
+                <a:solidFill>
+                  <a:srgbClr val="333333"/>
+                </a:solidFill>
+                <a:latin typeface="Calibri"/>
+              </a:rPr>
+              <a:t>• Start from structure (tabular vs nested vs spatial)</a:t>
             </a:r>
           </a:p>
           <a:p>
             <a:pPr>
-              <a:defRPr sz="2000"/>
+              <a:lnSpc>
+                <a:spcPts val="2200"/>
+              </a:lnSpc>
+              <a:spcAft>
+                <a:spcPts val="1000"/>
+              </a:spcAft>
             </a:pPr>
             <a:r>
-              <a:t>Consider size, update rate, and who will query it</a:t>
+              <a:rPr sz="2000" b="0">
+                <a:solidFill>
+                  <a:srgbClr val="333333"/>
+                </a:solidFill>
+                <a:latin typeface="Calibri"/>
+              </a:rPr>
+              <a:t>• Consider size, update rate, and who will query it</a:t>
             </a:r>
           </a:p>
           <a:p>
             <a:pPr>
-              <a:defRPr sz="2000"/>
+              <a:lnSpc>
+                <a:spcPts val="2200"/>
+              </a:lnSpc>
+              <a:spcAft>
+                <a:spcPts val="1000"/>
+              </a:spcAft>
             </a:pPr>
             <a:r>
-              <a:t>Prefer formats your stack already supports well</a:t>
+              <a:rPr sz="2000" b="0">
+                <a:solidFill>
+                  <a:srgbClr val="333333"/>
+                </a:solidFill>
+                <a:latin typeface="Calibri"/>
+              </a:rPr>
+              <a:t>• Prefer formats your stack already supports well</a:t>
             </a:r>
           </a:p>
           <a:p>
             <a:pPr>
-              <a:defRPr sz="2000"/>
+              <a:lnSpc>
+                <a:spcPts val="2200"/>
+              </a:lnSpc>
+              <a:spcAft>
+                <a:spcPts val="1000"/>
+              </a:spcAft>
             </a:pPr>
             <a:r>
-              <a:t>Document the choice in metadata (next quality topics)</a:t>
+              <a:rPr sz="2000" b="0">
+                <a:solidFill>
+                  <a:srgbClr val="333333"/>
+                </a:solidFill>
+                <a:latin typeface="Calibri"/>
+              </a:rPr>
+              <a:t>• Document the choice in metadata (next quality</a:t>
+            </a:r>
+          </a:p>
+          <a:p>
+            <a:pPr>
+              <a:lnSpc>
+                <a:spcPts val="2200"/>
+              </a:lnSpc>
+              <a:spcAft>
+                <a:spcPts val="1000"/>
+              </a:spcAft>
+            </a:pPr>
+            <a:r>
+              <a:rPr sz="2000" b="0">
+                <a:solidFill>
+                  <a:srgbClr val="333333"/>
+                </a:solidFill>
+                <a:latin typeface="Calibri"/>
+              </a:rPr>
+              <a:t>      topics)</a:t>
+            </a:r>
+          </a:p>
+        </p:txBody>
+      </p:sp>
+      <p:sp>
+        <p:nvSpPr>
+          <p:cNvPr id="4" name="TextBox 3"/>
+          <p:cNvSpPr txBox="1"/>
+          <p:nvPr/>
+        </p:nvSpPr>
+        <p:spPr>
+          <a:xfrm>
+            <a:off x="548640" y="6355080"/>
+            <a:ext cx="11064240" cy="320040"/>
+          </a:xfrm>
+          <a:prstGeom prst="rect">
+            <a:avLst/>
+          </a:prstGeom>
+          <a:noFill/>
+        </p:spPr>
+        <p:txBody>
+          <a:bodyPr wrap="square">
+            <a:noAutofit/>
+          </a:bodyPr>
+          <a:lstStyle/>
+          <a:p>
+            <a:pPr algn="r">
+              <a:lnSpc>
+                <a:spcPts val="2200"/>
+              </a:lnSpc>
+              <a:defRPr sz="1000" b="0">
+                <a:solidFill>
+                  <a:srgbClr val="666666"/>
+                </a:solidFill>
+                <a:latin typeface="Calibri"/>
+              </a:defRPr>
+            </a:pPr>
+            <a:r>
+              <a:t>Chapter 1 — Dataset Formats</a:t>
             </a:r>
           </a:p>
         </p:txBody>
@@ -3800,8 +4882,8 @@
         </p:nvSpPr>
         <p:spPr>
           <a:xfrm>
-            <a:off x="548640" y="320040"/>
-            <a:ext cx="11064240" cy="914400"/>
+            <a:off x="548640" y="411480"/>
+            <a:ext cx="11064240" cy="777240"/>
           </a:xfrm>
           <a:prstGeom prst="rect">
             <a:avLst/>
@@ -3809,15 +4891,23 @@
           <a:noFill/>
         </p:spPr>
         <p:txBody>
-          <a:bodyPr wrap="none">
-            <a:spAutoFit/>
+          <a:bodyPr wrap="square">
+            <a:noAutofit/>
           </a:bodyPr>
           <a:lstStyle/>
           <a:p>
             <a:pPr>
-              <a:defRPr sz="3200" b="1"/>
+              <a:lnSpc>
+                <a:spcPts val="2200"/>
+              </a:lnSpc>
             </a:pPr>
             <a:r>
+              <a:rPr sz="2800" b="1">
+                <a:solidFill>
+                  <a:srgbClr val="1A1A2E"/>
+                </a:solidFill>
+                <a:latin typeface="Calibri"/>
+              </a:rPr>
               <a:t>Takeaways</a:t>
             </a:r>
           </a:p>
@@ -3831,8 +4921,8 @@
         </p:nvSpPr>
         <p:spPr>
           <a:xfrm>
-            <a:off x="731520" y="1280160"/>
-            <a:ext cx="10515600" cy="5029200"/>
+            <a:off x="548640" y="1234440"/>
+            <a:ext cx="11064240" cy="4937760"/>
           </a:xfrm>
           <a:prstGeom prst="rect">
             <a:avLst/>
@@ -3841,63 +4931,78 @@
         </p:spPr>
         <p:txBody>
           <a:bodyPr wrap="square">
-            <a:spAutoFit/>
+            <a:noAutofit/>
           </a:bodyPr>
           <a:lstStyle/>
           <a:p>
             <a:pPr>
-              <a:defRPr sz="2000"/>
+              <a:lnSpc>
+                <a:spcPts val="2200"/>
+              </a:lnSpc>
+              <a:spcAft>
+                <a:spcPts val="1000"/>
+              </a:spcAft>
             </a:pPr>
             <a:r>
-              <a:t>Format = serialization of structure</a:t>
+              <a:rPr sz="2000" b="0">
+                <a:solidFill>
+                  <a:srgbClr val="333333"/>
+                </a:solidFill>
+                <a:latin typeface="Calibri"/>
+              </a:rPr>
+              <a:t>• Format = serialization of structure</a:t>
             </a:r>
           </a:p>
           <a:p>
             <a:pPr>
-              <a:defRPr sz="2000"/>
+              <a:lnSpc>
+                <a:spcPts val="2200"/>
+              </a:lnSpc>
+              <a:spcAft>
+                <a:spcPts val="1000"/>
+              </a:spcAft>
             </a:pPr>
             <a:r>
-              <a:t>CSV and SQL dominate everyday tables</a:t>
+              <a:rPr sz="2000" b="0">
+                <a:solidFill>
+                  <a:srgbClr val="333333"/>
+                </a:solidFill>
+                <a:latin typeface="Calibri"/>
+              </a:rPr>
+              <a:t>• CSV and SQL dominate everyday tables</a:t>
             </a:r>
           </a:p>
           <a:p>
             <a:pPr>
-              <a:defRPr sz="2000"/>
+              <a:lnSpc>
+                <a:spcPts val="2200"/>
+              </a:lnSpc>
+              <a:spcAft>
+                <a:spcPts val="1000"/>
+              </a:spcAft>
             </a:pPr>
             <a:r>
-              <a:t>HDF5 and GeoJSON serve specialized shapes and scales</a:t>
-            </a:r>
-          </a:p>
-        </p:txBody>
-      </p:sp>
-    </p:spTree>
-  </p:cSld>
-  <p:clrMapOvr>
-    <a:masterClrMapping/>
-  </p:clrMapOvr>
-</p:sld>
-</file>
-
-<file path=ppt/slides/slide9.xml><?xml version="1.0" encoding="utf-8"?>
-<p:sld xmlns:a="http://schemas.openxmlformats.org/drawingml/2006/main" xmlns:p="http://schemas.openxmlformats.org/presentationml/2006/main" xmlns:r="http://schemas.openxmlformats.org/officeDocument/2006/relationships">
-  <p:cSld>
-    <p:spTree>
-      <p:nvGrpSpPr>
-        <p:cNvPr id="1" name=""/>
-        <p:cNvGrpSpPr/>
-        <p:nvPr/>
-      </p:nvGrpSpPr>
-      <p:grpSpPr/>
-      <p:sp>
-        <p:nvSpPr>
-          <p:cNvPr id="2" name="TextBox 1"/>
+              <a:rPr sz="2000" b="0">
+                <a:solidFill>
+                  <a:srgbClr val="333333"/>
+                </a:solidFill>
+                <a:latin typeface="Calibri"/>
+              </a:rPr>
+              <a:t>• HDF5 and GeoJSON serve specialized shapes and scales</a:t>
+            </a:r>
+          </a:p>
+        </p:txBody>
+      </p:sp>
+      <p:sp>
+        <p:nvSpPr>
+          <p:cNvPr id="4" name="TextBox 3"/>
           <p:cNvSpPr txBox="1"/>
           <p:nvPr/>
         </p:nvSpPr>
         <p:spPr>
           <a:xfrm>
-            <a:off x="548640" y="320040"/>
-            <a:ext cx="11064240" cy="914400"/>
+            <a:off x="548640" y="6355080"/>
+            <a:ext cx="11064240" cy="320040"/>
           </a:xfrm>
           <a:prstGeom prst="rect">
             <a:avLst/>
@@ -3905,55 +5010,24 @@
           <a:noFill/>
         </p:spPr>
         <p:txBody>
-          <a:bodyPr wrap="none">
-            <a:spAutoFit/>
+          <a:bodyPr wrap="square">
+            <a:noAutofit/>
           </a:bodyPr>
           <a:lstStyle/>
           <a:p>
-            <a:pPr>
-              <a:defRPr sz="3200" b="1"/>
+            <a:pPr algn="r">
+              <a:lnSpc>
+                <a:spcPts val="2200"/>
+              </a:lnSpc>
+              <a:defRPr sz="1000" b="0">
+                <a:solidFill>
+                  <a:srgbClr val="666666"/>
+                </a:solidFill>
+                <a:latin typeface="Calibri"/>
+              </a:defRPr>
             </a:pPr>
             <a:r>
-              <a:t>Next</a:t>
-            </a:r>
-          </a:p>
-        </p:txBody>
-      </p:sp>
-      <p:sp>
-        <p:nvSpPr>
-          <p:cNvPr id="3" name="TextBox 2"/>
-          <p:cNvSpPr txBox="1"/>
-          <p:nvPr/>
-        </p:nvSpPr>
-        <p:spPr>
-          <a:xfrm>
-            <a:off x="731520" y="1280160"/>
-            <a:ext cx="10515600" cy="5029200"/>
-          </a:xfrm>
-          <a:prstGeom prst="rect">
-            <a:avLst/>
-          </a:prstGeom>
-          <a:noFill/>
-        </p:spPr>
-        <p:txBody>
-          <a:bodyPr wrap="square">
-            <a:spAutoFit/>
-          </a:bodyPr>
-          <a:lstStyle/>
-          <a:p>
-            <a:pPr>
-              <a:defRPr sz="2000"/>
-            </a:pPr>
-            <a:r>
-              <a:t>Complete the quiz for this clip</a:t>
-            </a:r>
-          </a:p>
-          <a:p>
-            <a:pPr>
-              <a:defRPr sz="2000"/>
-            </a:pPr>
-            <a:r>
-              <a:t>Then continue to: Characteristics of good datasets</a:t>
+              <a:t>Chapter 1 — Dataset Formats</a:t>
             </a:r>
           </a:p>
         </p:txBody>
@@ -4284,4 +5358,324 @@
   </a:objectDefaults>
   <a:extraClrSchemeLst/>
 </a:theme>
+</file>
+
+<file path=ppt/theme/theme2.xml><?xml version="1.0" encoding="utf-8"?>
+<a:theme xmlns:a="http://schemas.openxmlformats.org/drawingml/2006/main" name="Office Theme">
+  <a:themeElements>
+    <a:clrScheme name="Office">
+      <a:dk1>
+        <a:sysClr val="windowText" lastClr="000000"/>
+      </a:dk1>
+      <a:lt1>
+        <a:sysClr val="window" lastClr="FFFFFF"/>
+      </a:lt1>
+      <a:dk2>
+        <a:srgbClr val="1F497D"/>
+      </a:dk2>
+      <a:lt2>
+        <a:srgbClr val="EEECE1"/>
+      </a:lt2>
+      <a:accent1>
+        <a:srgbClr val="4F81BD"/>
+      </a:accent1>
+      <a:accent2>
+        <a:srgbClr val="C0504D"/>
+      </a:accent2>
+      <a:accent3>
+        <a:srgbClr val="9BBB59"/>
+      </a:accent3>
+      <a:accent4>
+        <a:srgbClr val="8064A2"/>
+      </a:accent4>
+      <a:accent5>
+        <a:srgbClr val="4BACC6"/>
+      </a:accent5>
+      <a:accent6>
+        <a:srgbClr val="F79646"/>
+      </a:accent6>
+      <a:hlink>
+        <a:srgbClr val="0000FF"/>
+      </a:hlink>
+      <a:folHlink>
+        <a:srgbClr val="800080"/>
+      </a:folHlink>
+    </a:clrScheme>
+    <a:fontScheme name="Office">
+      <a:majorFont>
+        <a:latin typeface="Calibri"/>
+        <a:ea typeface=""/>
+        <a:cs typeface=""/>
+        <a:font script="Jpan" typeface="ＭＳ Ｐゴシック"/>
+        <a:font script="Hang" typeface="맑은 고딕"/>
+        <a:font script="Hans" typeface="宋体"/>
+        <a:font script="Hant" typeface="新細明體"/>
+        <a:font script="Arab" typeface="Times New Roman"/>
+        <a:font script="Hebr" typeface="Times New Roman"/>
+        <a:font script="Thai" typeface="Angsana New"/>
+        <a:font script="Ethi" typeface="Nyala"/>
+        <a:font script="Beng" typeface="Vrinda"/>
+        <a:font script="Gujr" typeface="Shruti"/>
+        <a:font script="Khmr" typeface="MoolBoran"/>
+        <a:font script="Knda" typeface="Tunga"/>
+        <a:font script="Guru" typeface="Raavi"/>
+        <a:font script="Cans" typeface="Euphemia"/>
+        <a:font script="Cher" typeface="Plantagenet Cherokee"/>
+        <a:font script="Yiii" typeface="Microsoft Yi Baiti"/>
+        <a:font script="Tibt" typeface="Microsoft Himalaya"/>
+        <a:font script="Thaa" typeface="MV Boli"/>
+        <a:font script="Deva" typeface="Mangal"/>
+        <a:font script="Telu" typeface="Gautami"/>
+        <a:font script="Taml" typeface="Latha"/>
+        <a:font script="Syrc" typeface="Estrangelo Edessa"/>
+        <a:font script="Orya" typeface="Kalinga"/>
+        <a:font script="Mlym" typeface="Kartika"/>
+        <a:font script="Laoo" typeface="DokChampa"/>
+        <a:font script="Sinh" typeface="Iskoola Pota"/>
+        <a:font script="Mong" typeface="Mongolian Baiti"/>
+        <a:font script="Viet" typeface="Times New Roman"/>
+        <a:font script="Uigh" typeface="Microsoft Uighur"/>
+        <a:font script="Geor" typeface="Sylfaen"/>
+      </a:majorFont>
+      <a:minorFont>
+        <a:latin typeface="Calibri"/>
+        <a:ea typeface=""/>
+        <a:cs typeface=""/>
+        <a:font script="Jpan" typeface="ＭＳ Ｐゴシック"/>
+        <a:font script="Hang" typeface="맑은 고딕"/>
+        <a:font script="Hans" typeface="宋体"/>
+        <a:font script="Hant" typeface="新細明體"/>
+        <a:font script="Arab" typeface="Arial"/>
+        <a:font script="Hebr" typeface="Arial"/>
+        <a:font script="Thai" typeface="Cordia New"/>
+        <a:font script="Ethi" typeface="Nyala"/>
+        <a:font script="Beng" typeface="Vrinda"/>
+        <a:font script="Gujr" typeface="Shruti"/>
+        <a:font script="Khmr" typeface="DaunPenh"/>
+        <a:font script="Knda" typeface="Tunga"/>
+        <a:font script="Guru" typeface="Raavi"/>
+        <a:font script="Cans" typeface="Euphemia"/>
+        <a:font script="Cher" typeface="Plantagenet Cherokee"/>
+        <a:font script="Yiii" typeface="Microsoft Yi Baiti"/>
+        <a:font script="Tibt" typeface="Microsoft Himalaya"/>
+        <a:font script="Thaa" typeface="MV Boli"/>
+        <a:font script="Deva" typeface="Mangal"/>
+        <a:font script="Telu" typeface="Gautami"/>
+        <a:font script="Taml" typeface="Latha"/>
+        <a:font script="Syrc" typeface="Estrangelo Edessa"/>
+        <a:font script="Orya" typeface="Kalinga"/>
+        <a:font script="Mlym" typeface="Kartika"/>
+        <a:font script="Laoo" typeface="DokChampa"/>
+        <a:font script="Sinh" typeface="Iskoola Pota"/>
+        <a:font script="Mong" typeface="Mongolian Baiti"/>
+        <a:font script="Viet" typeface="Arial"/>
+        <a:font script="Uigh" typeface="Microsoft Uighur"/>
+        <a:font script="Geor" typeface="Sylfaen"/>
+      </a:minorFont>
+    </a:fontScheme>
+    <a:fmtScheme name="Office">
+      <a:fillStyleLst>
+        <a:solidFill>
+          <a:schemeClr val="phClr"/>
+        </a:solidFill>
+        <a:gradFill rotWithShape="1">
+          <a:gsLst>
+            <a:gs pos="0">
+              <a:schemeClr val="phClr">
+                <a:tint val="50000"/>
+                <a:satMod val="300000"/>
+              </a:schemeClr>
+            </a:gs>
+            <a:gs pos="35000">
+              <a:schemeClr val="phClr">
+                <a:tint val="37000"/>
+                <a:satMod val="300000"/>
+              </a:schemeClr>
+            </a:gs>
+            <a:gs pos="100000">
+              <a:schemeClr val="phClr">
+                <a:tint val="15000"/>
+                <a:satMod val="350000"/>
+              </a:schemeClr>
+            </a:gs>
+          </a:gsLst>
+          <a:lin ang="16200000" scaled="1"/>
+        </a:gradFill>
+        <a:gradFill rotWithShape="1">
+          <a:gsLst>
+            <a:gs pos="0">
+              <a:schemeClr val="phClr">
+                <a:tint val="100000"/>
+                <a:shade val="100000"/>
+                <a:satMod val="130000"/>
+              </a:schemeClr>
+            </a:gs>
+            <a:gs pos="100000">
+              <a:schemeClr val="phClr">
+                <a:tint val="50000"/>
+                <a:shade val="100000"/>
+                <a:satMod val="350000"/>
+              </a:schemeClr>
+            </a:gs>
+          </a:gsLst>
+          <a:lin ang="16200000" scaled="0"/>
+        </a:gradFill>
+      </a:fillStyleLst>
+      <a:lnStyleLst>
+        <a:ln w="9525" cap="flat" cmpd="sng" algn="ctr">
+          <a:solidFill>
+            <a:schemeClr val="phClr">
+              <a:shade val="95000"/>
+              <a:satMod val="105000"/>
+            </a:schemeClr>
+          </a:solidFill>
+          <a:prstDash val="solid"/>
+        </a:ln>
+        <a:ln w="25400" cap="flat" cmpd="sng" algn="ctr">
+          <a:solidFill>
+            <a:schemeClr val="phClr"/>
+          </a:solidFill>
+          <a:prstDash val="solid"/>
+        </a:ln>
+        <a:ln w="38100" cap="flat" cmpd="sng" algn="ctr">
+          <a:solidFill>
+            <a:schemeClr val="phClr"/>
+          </a:solidFill>
+          <a:prstDash val="solid"/>
+        </a:ln>
+      </a:lnStyleLst>
+      <a:effectStyleLst>
+        <a:effectStyle>
+          <a:effectLst>
+            <a:outerShdw blurRad="40000" dist="20000" dir="5400000" rotWithShape="0">
+              <a:srgbClr val="000000">
+                <a:alpha val="38000"/>
+              </a:srgbClr>
+            </a:outerShdw>
+          </a:effectLst>
+        </a:effectStyle>
+        <a:effectStyle>
+          <a:effectLst>
+            <a:outerShdw blurRad="40000" dist="23000" dir="5400000" rotWithShape="0">
+              <a:srgbClr val="000000">
+                <a:alpha val="35000"/>
+              </a:srgbClr>
+            </a:outerShdw>
+          </a:effectLst>
+        </a:effectStyle>
+        <a:effectStyle>
+          <a:effectLst>
+            <a:outerShdw blurRad="40000" dist="23000" dir="5400000" rotWithShape="0">
+              <a:srgbClr val="000000">
+                <a:alpha val="35000"/>
+              </a:srgbClr>
+            </a:outerShdw>
+          </a:effectLst>
+          <a:scene3d>
+            <a:camera prst="orthographicFront">
+              <a:rot lat="0" lon="0" rev="0"/>
+            </a:camera>
+            <a:lightRig rig="threePt" dir="t">
+              <a:rot lat="0" lon="0" rev="1200000"/>
+            </a:lightRig>
+          </a:scene3d>
+          <a:sp3d>
+            <a:bevelT w="63500" h="25400"/>
+          </a:sp3d>
+        </a:effectStyle>
+      </a:effectStyleLst>
+      <a:bgFillStyleLst>
+        <a:solidFill>
+          <a:schemeClr val="phClr"/>
+        </a:solidFill>
+        <a:gradFill rotWithShape="1">
+          <a:gsLst>
+            <a:gs pos="0">
+              <a:schemeClr val="phClr">
+                <a:tint val="40000"/>
+                <a:satMod val="350000"/>
+              </a:schemeClr>
+            </a:gs>
+            <a:gs pos="40000">
+              <a:schemeClr val="phClr">
+                <a:tint val="45000"/>
+                <a:shade val="99000"/>
+                <a:satMod val="350000"/>
+              </a:schemeClr>
+            </a:gs>
+            <a:gs pos="100000">
+              <a:schemeClr val="phClr">
+                <a:shade val="20000"/>
+                <a:satMod val="255000"/>
+              </a:schemeClr>
+            </a:gs>
+          </a:gsLst>
+          <a:path path="circle">
+            <a:fillToRect l="50000" t="-80000" r="50000" b="180000"/>
+          </a:path>
+        </a:gradFill>
+        <a:gradFill rotWithShape="1">
+          <a:gsLst>
+            <a:gs pos="0">
+              <a:schemeClr val="phClr">
+                <a:tint val="80000"/>
+                <a:satMod val="300000"/>
+              </a:schemeClr>
+            </a:gs>
+            <a:gs pos="100000">
+              <a:schemeClr val="phClr">
+                <a:shade val="30000"/>
+                <a:satMod val="200000"/>
+              </a:schemeClr>
+            </a:gs>
+          </a:gsLst>
+          <a:path path="circle">
+            <a:fillToRect l="50000" t="50000" r="50000" b="50000"/>
+          </a:path>
+        </a:gradFill>
+      </a:bgFillStyleLst>
+    </a:fmtScheme>
+  </a:themeElements>
+  <a:objectDefaults>
+    <a:spDef>
+      <a:spPr/>
+      <a:bodyPr/>
+      <a:lstStyle/>
+      <a:style>
+        <a:lnRef idx="1">
+          <a:schemeClr val="accent1"/>
+        </a:lnRef>
+        <a:fillRef idx="3">
+          <a:schemeClr val="accent1"/>
+        </a:fillRef>
+        <a:effectRef idx="2">
+          <a:schemeClr val="accent1"/>
+        </a:effectRef>
+        <a:fontRef idx="minor">
+          <a:schemeClr val="lt1"/>
+        </a:fontRef>
+      </a:style>
+    </a:spDef>
+    <a:lnDef>
+      <a:spPr/>
+      <a:bodyPr/>
+      <a:lstStyle/>
+      <a:style>
+        <a:lnRef idx="2">
+          <a:schemeClr val="accent1"/>
+        </a:lnRef>
+        <a:fillRef idx="0">
+          <a:schemeClr val="accent1"/>
+        </a:fillRef>
+        <a:effectRef idx="1">
+          <a:schemeClr val="accent1"/>
+        </a:effectRef>
+        <a:fontRef idx="minor">
+          <a:schemeClr val="tx1"/>
+        </a:fontRef>
+      </a:style>
+    </a:lnDef>
+  </a:objectDefaults>
+  <a:extraClrSchemeLst/>
+</a:theme>
 </file>
--- a/chapter1/clips/clip-03-dataset-formats/clip.pptx
+++ b/chapter1/clips/clip-03-dataset-formats/clip.pptx
@@ -6,13 +6,16 @@
   </p:sldMasterIdLst>
   <p:sldIdLst>
     <p:sldId id="256" r:id="rId7"/>
-    <p:sldId id="257" r:id="rId8"/>
-    <p:sldId id="258" r:id="rId9"/>
-    <p:sldId id="259" r:id="rId10"/>
-    <p:sldId id="260" r:id="rId11"/>
+    <p:sldId id="257" r:id="rId9"/>
+    <p:sldId id="258" r:id="rId10"/>
+    <p:sldId id="259" r:id="rId11"/>
+    <p:sldId id="260" r:id="rId12"/>
     <p:sldId id="261" r:id="rId13"/>
     <p:sldId id="262" r:id="rId14"/>
     <p:sldId id="263" r:id="rId15"/>
+    <p:sldId id="264" r:id="rId16"/>
+    <p:sldId id="265" r:id="rId17"/>
+    <p:sldId id="266" r:id="rId18"/>
   </p:sldIdLst>
   <p:sldSz cx="12191695" cy="6858000" type="screen4x3"/>
   <p:notesSz cx="6858000" cy="9144000"/>
@@ -509,17 +512,7 @@
           <a:lstStyle/>
           <a:p>
             <a:r>
-              <a:t>Setting: relational tables with typed columns</a:t>
-            </a:r>
-          </a:p>
-          <a:p>
-            <a:r>
-              <a:t>Key idea: schema + queries for filtering and joins</a:t>
-            </a:r>
-          </a:p>
-          <a:p>
-            <a:r>
-              <a:t>Fits structured datasets with stable attributes</a:t>
+              <a:t>Structure tells you how records are organized; format tells you how they are stored. This clip connects common on-disk formats to the types from the previous clip.</a:t>
             </a:r>
           </a:p>
         </p:txBody>
@@ -589,17 +582,497 @@
           <a:lstStyle/>
           <a:p>
             <a:r>
-              <a:t>Setting: hierarchical binary store for arrays</a:t>
-            </a:r>
-          </a:p>
-          <a:p>
-            <a:r>
-              <a:t>Key idea: efficient read/write for large numeric data</a:t>
-            </a:r>
-          </a:p>
-          <a:p>
-            <a:r>
-              <a:t>Common in scientific and ML feature pipelines</a:t>
+              <a:t>You should leave able to name formats for tabular, hierarchical, and geospatial data, explain when CSV, SQL, HDF5, or GeoJSON fits, and connect format choice to the tools that will consume the data.</a:t>
+            </a:r>
+          </a:p>
+        </p:txBody>
+      </p:sp>
+      <p:sp>
+        <p:nvSpPr>
+          <p:cNvPr id="4" name="Slide Number Placeholder 3"/>
+          <p:cNvSpPr>
+            <a:spLocks noGrp="1"/>
+          </p:cNvSpPr>
+          <p:nvPr>
+            <p:ph type="sldNum" idx="5" sz="quarter"/>
+          </p:nvPr>
+        </p:nvSpPr>
+        <p:spPr/>
+      </p:sp>
+    </p:spTree>
+  </p:cSld>
+  <p:clrMapOvr>
+    <a:masterClrMapping/>
+  </p:clrMapOvr>
+</p:notes>
+</file>
+
+<file path=ppt/notesSlides/notesSlide3.xml><?xml version="1.0" encoding="utf-8"?>
+<p:notes xmlns:a="http://schemas.openxmlformats.org/drawingml/2006/main" xmlns:p="http://schemas.openxmlformats.org/presentationml/2006/main" xmlns:r="http://schemas.openxmlformats.org/officeDocument/2006/relationships">
+  <p:cSld>
+    <p:spTree>
+      <p:nvGrpSpPr>
+        <p:cNvPr id="1" name=""/>
+        <p:cNvGrpSpPr/>
+        <p:nvPr/>
+      </p:nvGrpSpPr>
+      <p:grpSpPr>
+        <a:xfrm>
+          <a:off x="0" y="0"/>
+          <a:ext cx="0" cy="0"/>
+          <a:chOff x="0" y="0"/>
+          <a:chExt cx="0" cy="0"/>
+        </a:xfrm>
+      </p:grpSpPr>
+      <p:sp>
+        <p:nvSpPr>
+          <p:cNvPr id="2" name="Slide Image Placeholder 1"/>
+          <p:cNvSpPr>
+            <a:spLocks noGrp="1"/>
+          </p:cNvSpPr>
+          <p:nvPr>
+            <p:ph type="sldImg" idx="2"/>
+          </p:nvPr>
+        </p:nvSpPr>
+        <p:spPr/>
+      </p:sp>
+      <p:sp>
+        <p:nvSpPr>
+          <p:cNvPr id="3" name="Notes Placeholder 2"/>
+          <p:cNvSpPr>
+            <a:spLocks noGrp="1"/>
+          </p:cNvSpPr>
+          <p:nvPr>
+            <p:ph type="body" idx="3" sz="quarter"/>
+          </p:nvPr>
+        </p:nvSpPr>
+        <p:spPr/>
+        <p:txBody>
+          <a:bodyPr/>
+          <a:lstStyle/>
+          <a:p>
+            <a:r>
+              <a:t>Format is the serialization of structure. Matching format to structure, expected volume, and downstream tools reduces friction across collection and analysis. A mismatch—for example, forcing huge arrays through naive CSV—creates avoidable cost.</a:t>
+            </a:r>
+          </a:p>
+        </p:txBody>
+      </p:sp>
+      <p:sp>
+        <p:nvSpPr>
+          <p:cNvPr id="4" name="Slide Number Placeholder 3"/>
+          <p:cNvSpPr>
+            <a:spLocks noGrp="1"/>
+          </p:cNvSpPr>
+          <p:nvPr>
+            <p:ph type="sldNum" idx="5" sz="quarter"/>
+          </p:nvPr>
+        </p:nvSpPr>
+        <p:spPr/>
+      </p:sp>
+    </p:spTree>
+  </p:cSld>
+  <p:clrMapOvr>
+    <a:masterClrMapping/>
+  </p:clrMapOvr>
+</p:notes>
+</file>
+
+<file path=ppt/notesSlides/notesSlide4.xml><?xml version="1.0" encoding="utf-8"?>
+<p:notes xmlns:a="http://schemas.openxmlformats.org/drawingml/2006/main" xmlns:p="http://schemas.openxmlformats.org/presentationml/2006/main" xmlns:r="http://schemas.openxmlformats.org/officeDocument/2006/relationships">
+  <p:cSld>
+    <p:spTree>
+      <p:nvGrpSpPr>
+        <p:cNvPr id="1" name=""/>
+        <p:cNvGrpSpPr/>
+        <p:nvPr/>
+      </p:nvGrpSpPr>
+      <p:grpSpPr>
+        <a:xfrm>
+          <a:off x="0" y="0"/>
+          <a:ext cx="0" cy="0"/>
+          <a:chOff x="0" y="0"/>
+          <a:chExt cx="0" cy="0"/>
+        </a:xfrm>
+      </p:grpSpPr>
+      <p:sp>
+        <p:nvSpPr>
+          <p:cNvPr id="2" name="Slide Image Placeholder 1"/>
+          <p:cNvSpPr>
+            <a:spLocks noGrp="1"/>
+          </p:cNvSpPr>
+          <p:nvPr>
+            <p:ph type="sldImg" idx="2"/>
+          </p:nvPr>
+        </p:nvSpPr>
+        <p:spPr/>
+      </p:sp>
+      <p:sp>
+        <p:nvSpPr>
+          <p:cNvPr id="3" name="Notes Placeholder 2"/>
+          <p:cNvSpPr>
+            <a:spLocks noGrp="1"/>
+          </p:cNvSpPr>
+          <p:nvPr>
+            <p:ph type="body" idx="3" sz="quarter"/>
+          </p:nvPr>
+        </p:nvSpPr>
+        <p:spPr/>
+        <p:txBody>
+          <a:bodyPr/>
+          <a:lstStyle/>
+          <a:p>
+            <a:r>
+              <a:t>CSV remains the common language for simple tables. SQL tables add typed schemas and efficient queries. JSON and GeoJSON handle nested objects and spatial features. HDF5 targets large scientific or array-oriented datasets. Each aligns with a structural niche.</a:t>
+            </a:r>
+          </a:p>
+        </p:txBody>
+      </p:sp>
+      <p:sp>
+        <p:nvSpPr>
+          <p:cNvPr id="4" name="Slide Number Placeholder 3"/>
+          <p:cNvSpPr>
+            <a:spLocks noGrp="1"/>
+          </p:cNvSpPr>
+          <p:nvPr>
+            <p:ph type="sldNum" idx="5" sz="quarter"/>
+          </p:nvPr>
+        </p:nvSpPr>
+        <p:spPr/>
+      </p:sp>
+    </p:spTree>
+  </p:cSld>
+  <p:clrMapOvr>
+    <a:masterClrMapping/>
+  </p:clrMapOvr>
+</p:notes>
+</file>
+
+<file path=ppt/notesSlides/notesSlide5.xml><?xml version="1.0" encoding="utf-8"?>
+<p:notes xmlns:a="http://schemas.openxmlformats.org/drawingml/2006/main" xmlns:p="http://schemas.openxmlformats.org/presentationml/2006/main" xmlns:r="http://schemas.openxmlformats.org/officeDocument/2006/relationships">
+  <p:cSld>
+    <p:spTree>
+      <p:nvGrpSpPr>
+        <p:cNvPr id="1" name=""/>
+        <p:cNvGrpSpPr/>
+        <p:nvPr/>
+      </p:nvGrpSpPr>
+      <p:grpSpPr>
+        <a:xfrm>
+          <a:off x="0" y="0"/>
+          <a:ext cx="0" cy="0"/>
+          <a:chOff x="0" y="0"/>
+          <a:chExt cx="0" cy="0"/>
+        </a:xfrm>
+      </p:grpSpPr>
+      <p:sp>
+        <p:nvSpPr>
+          <p:cNvPr id="2" name="Slide Image Placeholder 1"/>
+          <p:cNvSpPr>
+            <a:spLocks noGrp="1"/>
+          </p:cNvSpPr>
+          <p:nvPr>
+            <p:ph type="sldImg" idx="2"/>
+          </p:nvPr>
+        </p:nvSpPr>
+        <p:spPr/>
+      </p:sp>
+      <p:sp>
+        <p:nvSpPr>
+          <p:cNvPr id="3" name="Notes Placeholder 2"/>
+          <p:cNvSpPr>
+            <a:spLocks noGrp="1"/>
+          </p:cNvSpPr>
+          <p:nvPr>
+            <p:ph type="body" idx="3" sz="quarter"/>
+          </p:nvPr>
+        </p:nvSpPr>
+        <p:spPr/>
+        <p:txBody>
+          <a:bodyPr/>
+          <a:lstStyle/>
+          <a:p>
+            <a:r>
+              <a:t>Example 1.8 shows structured data in a relational form: typed columns and queries for filtering and joins. When attributes are stable and analysts need aggregations, SQL, or an equivalent relational store, is a natural fit. The example 8 module lets you explore this hands-on.</a:t>
+            </a:r>
+          </a:p>
+        </p:txBody>
+      </p:sp>
+      <p:sp>
+        <p:nvSpPr>
+          <p:cNvPr id="4" name="Slide Number Placeholder 3"/>
+          <p:cNvSpPr>
+            <a:spLocks noGrp="1"/>
+          </p:cNvSpPr>
+          <p:nvPr>
+            <p:ph type="sldNum" idx="5" sz="quarter"/>
+          </p:nvPr>
+        </p:nvSpPr>
+        <p:spPr/>
+      </p:sp>
+    </p:spTree>
+  </p:cSld>
+  <p:clrMapOvr>
+    <a:masterClrMapping/>
+  </p:clrMapOvr>
+</p:notes>
+</file>
+
+<file path=ppt/notesSlides/notesSlide6.xml><?xml version="1.0" encoding="utf-8"?>
+<p:notes xmlns:a="http://schemas.openxmlformats.org/drawingml/2006/main" xmlns:p="http://schemas.openxmlformats.org/presentationml/2006/main" xmlns:r="http://schemas.openxmlformats.org/officeDocument/2006/relationships">
+  <p:cSld>
+    <p:spTree>
+      <p:nvGrpSpPr>
+        <p:cNvPr id="1" name=""/>
+        <p:cNvGrpSpPr/>
+        <p:nvPr/>
+      </p:nvGrpSpPr>
+      <p:grpSpPr>
+        <a:xfrm>
+          <a:off x="0" y="0"/>
+          <a:ext cx="0" cy="0"/>
+          <a:chOff x="0" y="0"/>
+          <a:chExt cx="0" cy="0"/>
+        </a:xfrm>
+      </p:grpSpPr>
+      <p:sp>
+        <p:nvSpPr>
+          <p:cNvPr id="2" name="Slide Image Placeholder 1"/>
+          <p:cNvSpPr>
+            <a:spLocks noGrp="1"/>
+          </p:cNvSpPr>
+          <p:nvPr>
+            <p:ph type="sldImg" idx="2"/>
+          </p:nvPr>
+        </p:nvSpPr>
+        <p:spPr/>
+      </p:sp>
+      <p:sp>
+        <p:nvSpPr>
+          <p:cNvPr id="3" name="Notes Placeholder 2"/>
+          <p:cNvSpPr>
+            <a:spLocks noGrp="1"/>
+          </p:cNvSpPr>
+          <p:nvPr>
+            <p:ph type="body" idx="3" sz="quarter"/>
+          </p:nvPr>
+        </p:nvSpPr>
+        <p:spPr/>
+        <p:txBody>
+          <a:bodyPr/>
+          <a:lstStyle/>
+          <a:p>
+            <a:r>
+              <a:t>Example 1.9 creates and reads an HDF5 file—a hierarchical binary format efficient for large numeric arrays. Scientific and machine-learning pipelines often prefer HDF5 when CSV becomes too slow or too large. Try the example 9 module to create and read one yourself.</a:t>
+            </a:r>
+          </a:p>
+        </p:txBody>
+      </p:sp>
+      <p:sp>
+        <p:nvSpPr>
+          <p:cNvPr id="4" name="Slide Number Placeholder 3"/>
+          <p:cNvSpPr>
+            <a:spLocks noGrp="1"/>
+          </p:cNvSpPr>
+          <p:nvPr>
+            <p:ph type="sldNum" idx="5" sz="quarter"/>
+          </p:nvPr>
+        </p:nvSpPr>
+        <p:spPr/>
+      </p:sp>
+    </p:spTree>
+  </p:cSld>
+  <p:clrMapOvr>
+    <a:masterClrMapping/>
+  </p:clrMapOvr>
+</p:notes>
+</file>
+
+<file path=ppt/notesSlides/notesSlide7.xml><?xml version="1.0" encoding="utf-8"?>
+<p:notes xmlns:a="http://schemas.openxmlformats.org/drawingml/2006/main" xmlns:p="http://schemas.openxmlformats.org/presentationml/2006/main" xmlns:r="http://schemas.openxmlformats.org/officeDocument/2006/relationships">
+  <p:cSld>
+    <p:spTree>
+      <p:nvGrpSpPr>
+        <p:cNvPr id="1" name=""/>
+        <p:cNvGrpSpPr/>
+        <p:nvPr/>
+      </p:nvGrpSpPr>
+      <p:grpSpPr>
+        <a:xfrm>
+          <a:off x="0" y="0"/>
+          <a:ext cx="0" cy="0"/>
+          <a:chOff x="0" y="0"/>
+          <a:chExt cx="0" cy="0"/>
+        </a:xfrm>
+      </p:grpSpPr>
+      <p:sp>
+        <p:nvSpPr>
+          <p:cNvPr id="2" name="Slide Image Placeholder 1"/>
+          <p:cNvSpPr>
+            <a:spLocks noGrp="1"/>
+          </p:cNvSpPr>
+          <p:nvPr>
+            <p:ph type="sldImg" idx="2"/>
+          </p:nvPr>
+        </p:nvSpPr>
+        <p:spPr/>
+      </p:sp>
+      <p:sp>
+        <p:nvSpPr>
+          <p:cNvPr id="3" name="Notes Placeholder 2"/>
+          <p:cNvSpPr>
+            <a:spLocks noGrp="1"/>
+          </p:cNvSpPr>
+          <p:nvPr>
+            <p:ph type="body" idx="3" sz="quarter"/>
+          </p:nvPr>
+        </p:nvSpPr>
+        <p:spPr/>
+        <p:txBody>
+          <a:bodyPr/>
+          <a:lstStyle/>
+          <a:p>
+            <a:r>
+              <a:t>Start from structure, then consider size, update rate, and tooling. Prefer formats your team already supports, and document the choice so later consumers are not guessing. Metadata and documentation—covered next—make that choice durable.</a:t>
+            </a:r>
+          </a:p>
+        </p:txBody>
+      </p:sp>
+      <p:sp>
+        <p:nvSpPr>
+          <p:cNvPr id="4" name="Slide Number Placeholder 3"/>
+          <p:cNvSpPr>
+            <a:spLocks noGrp="1"/>
+          </p:cNvSpPr>
+          <p:nvPr>
+            <p:ph type="sldNum" idx="5" sz="quarter"/>
+          </p:nvPr>
+        </p:nvSpPr>
+        <p:spPr/>
+      </p:sp>
+    </p:spTree>
+  </p:cSld>
+  <p:clrMapOvr>
+    <a:masterClrMapping/>
+  </p:clrMapOvr>
+</p:notes>
+</file>
+
+<file path=ppt/notesSlides/notesSlide8.xml><?xml version="1.0" encoding="utf-8"?>
+<p:notes xmlns:a="http://schemas.openxmlformats.org/drawingml/2006/main" xmlns:p="http://schemas.openxmlformats.org/presentationml/2006/main" xmlns:r="http://schemas.openxmlformats.org/officeDocument/2006/relationships">
+  <p:cSld>
+    <p:spTree>
+      <p:nvGrpSpPr>
+        <p:cNvPr id="1" name=""/>
+        <p:cNvGrpSpPr/>
+        <p:nvPr/>
+      </p:nvGrpSpPr>
+      <p:grpSpPr>
+        <a:xfrm>
+          <a:off x="0" y="0"/>
+          <a:ext cx="0" cy="0"/>
+          <a:chOff x="0" y="0"/>
+          <a:chExt cx="0" cy="0"/>
+        </a:xfrm>
+      </p:grpSpPr>
+      <p:sp>
+        <p:nvSpPr>
+          <p:cNvPr id="2" name="Slide Image Placeholder 1"/>
+          <p:cNvSpPr>
+            <a:spLocks noGrp="1"/>
+          </p:cNvSpPr>
+          <p:nvPr>
+            <p:ph type="sldImg" idx="2"/>
+          </p:nvPr>
+        </p:nvSpPr>
+        <p:spPr/>
+      </p:sp>
+      <p:sp>
+        <p:nvSpPr>
+          <p:cNvPr id="3" name="Notes Placeholder 2"/>
+          <p:cNvSpPr>
+            <a:spLocks noGrp="1"/>
+          </p:cNvSpPr>
+          <p:nvPr>
+            <p:ph type="body" idx="3" sz="quarter"/>
+          </p:nvPr>
+        </p:nvSpPr>
+        <p:spPr/>
+        <p:txBody>
+          <a:bodyPr/>
+          <a:lstStyle/>
+          <a:p>
+            <a:r>
+              <a:t>Format serializes structure. Everyday tables lean on CSV and SQL; specialized shapes and scales use HDF5, GeoJSON, and related formats.</a:t>
+            </a:r>
+          </a:p>
+        </p:txBody>
+      </p:sp>
+      <p:sp>
+        <p:nvSpPr>
+          <p:cNvPr id="4" name="Slide Number Placeholder 3"/>
+          <p:cNvSpPr>
+            <a:spLocks noGrp="1"/>
+          </p:cNvSpPr>
+          <p:nvPr>
+            <p:ph type="sldNum" idx="5" sz="quarter"/>
+          </p:nvPr>
+        </p:nvSpPr>
+        <p:spPr/>
+      </p:sp>
+    </p:spTree>
+  </p:cSld>
+  <p:clrMapOvr>
+    <a:masterClrMapping/>
+  </p:clrMapOvr>
+</p:notes>
+</file>
+
+<file path=ppt/notesSlides/notesSlide9.xml><?xml version="1.0" encoding="utf-8"?>
+<p:notes xmlns:a="http://schemas.openxmlformats.org/drawingml/2006/main" xmlns:p="http://schemas.openxmlformats.org/presentationml/2006/main" xmlns:r="http://schemas.openxmlformats.org/officeDocument/2006/relationships">
+  <p:cSld>
+    <p:spTree>
+      <p:nvGrpSpPr>
+        <p:cNvPr id="1" name=""/>
+        <p:cNvGrpSpPr/>
+        <p:nvPr/>
+      </p:nvGrpSpPr>
+      <p:grpSpPr>
+        <a:xfrm>
+          <a:off x="0" y="0"/>
+          <a:ext cx="0" cy="0"/>
+          <a:chOff x="0" y="0"/>
+          <a:chExt cx="0" cy="0"/>
+        </a:xfrm>
+      </p:grpSpPr>
+      <p:sp>
+        <p:nvSpPr>
+          <p:cNvPr id="2" name="Slide Image Placeholder 1"/>
+          <p:cNvSpPr>
+            <a:spLocks noGrp="1"/>
+          </p:cNvSpPr>
+          <p:nvPr>
+            <p:ph type="sldImg" idx="2"/>
+          </p:nvPr>
+        </p:nvSpPr>
+        <p:spPr/>
+      </p:sp>
+      <p:sp>
+        <p:nvSpPr>
+          <p:cNvPr id="3" name="Notes Placeholder 2"/>
+          <p:cNvSpPr>
+            <a:spLocks noGrp="1"/>
+          </p:cNvSpPr>
+          <p:nvPr>
+            <p:ph type="body" idx="3" sz="quarter"/>
+          </p:nvPr>
+        </p:nvSpPr>
+        <p:spPr/>
+        <p:txBody>
+          <a:bodyPr/>
+          <a:lstStyle/>
+          <a:p>
+            <a:r>
+              <a:t>Complete the quiz, then move to characteristics of good datasets—accuracy, completeness, and related quality dimensions.</a:t>
             </a:r>
           </a:p>
         </p:txBody>
@@ -3661,7 +4134,7 @@
                 </a:solidFill>
                 <a:latin typeface="Calibri"/>
               </a:rPr>
-              <a:t>Match storage formats to structure, volume, and tools</a:t>
+              <a:t>Structure tells you how records are organized; format tells you how they are stored</a:t>
             </a:r>
           </a:p>
         </p:txBody>
@@ -3700,7 +4173,325 @@
               </a:defRPr>
             </a:pPr>
             <a:r>
-              <a:t>Chapter 1 — Dataset Formats</a:t>
+              <a:t>Chapter 1 — 03 Dataset Formats</a:t>
+            </a:r>
+          </a:p>
+        </p:txBody>
+      </p:sp>
+    </p:spTree>
+  </p:cSld>
+  <p:clrMapOvr>
+    <a:masterClrMapping/>
+  </p:clrMapOvr>
+</p:sld>
+</file>
+
+<file path=ppt/slides/slide10.xml><?xml version="1.0" encoding="utf-8"?>
+<p:sld xmlns:a="http://schemas.openxmlformats.org/drawingml/2006/main" xmlns:p="http://schemas.openxmlformats.org/presentationml/2006/main" xmlns:r="http://schemas.openxmlformats.org/officeDocument/2006/relationships">
+  <p:cSld>
+    <p:spTree>
+      <p:nvGrpSpPr>
+        <p:cNvPr id="1" name=""/>
+        <p:cNvGrpSpPr/>
+        <p:nvPr/>
+      </p:nvGrpSpPr>
+      <p:grpSpPr/>
+      <p:sp>
+        <p:nvSpPr>
+          <p:cNvPr id="2" name="TextBox 1"/>
+          <p:cNvSpPr txBox="1"/>
+          <p:nvPr/>
+        </p:nvSpPr>
+        <p:spPr>
+          <a:xfrm>
+            <a:off x="548640" y="411480"/>
+            <a:ext cx="11064240" cy="777240"/>
+          </a:xfrm>
+          <a:prstGeom prst="rect">
+            <a:avLst/>
+          </a:prstGeom>
+          <a:noFill/>
+        </p:spPr>
+        <p:txBody>
+          <a:bodyPr wrap="square">
+            <a:noAutofit/>
+          </a:bodyPr>
+          <a:lstStyle/>
+          <a:p>
+            <a:pPr>
+              <a:lnSpc>
+                <a:spcPts val="2200"/>
+              </a:lnSpc>
+            </a:pPr>
+            <a:r>
+              <a:rPr sz="2800" b="1">
+                <a:solidFill>
+                  <a:srgbClr val="1A1A2E"/>
+                </a:solidFill>
+                <a:latin typeface="Calibri"/>
+              </a:rPr>
+              <a:t>Takeaways</a:t>
+            </a:r>
+          </a:p>
+        </p:txBody>
+      </p:sp>
+      <p:sp>
+        <p:nvSpPr>
+          <p:cNvPr id="3" name="TextBox 2"/>
+          <p:cNvSpPr txBox="1"/>
+          <p:nvPr/>
+        </p:nvSpPr>
+        <p:spPr>
+          <a:xfrm>
+            <a:off x="548640" y="1234440"/>
+            <a:ext cx="11064240" cy="4937760"/>
+          </a:xfrm>
+          <a:prstGeom prst="rect">
+            <a:avLst/>
+          </a:prstGeom>
+          <a:noFill/>
+        </p:spPr>
+        <p:txBody>
+          <a:bodyPr wrap="square">
+            <a:noAutofit/>
+          </a:bodyPr>
+          <a:lstStyle/>
+          <a:p>
+            <a:pPr>
+              <a:spcAft>
+                <a:spcPts val="1000"/>
+              </a:spcAft>
+              <a:buChar char="•"/>
+              <a:lnSpc>
+                <a:spcPts val="2200"/>
+              </a:lnSpc>
+            </a:pPr>
+            <a:r>
+              <a:rPr sz="2000" b="0">
+                <a:solidFill>
+                  <a:srgbClr val="333333"/>
+                </a:solidFill>
+                <a:latin typeface="Calibri"/>
+              </a:rPr>
+              <a:t>Format serializes structure</a:t>
+            </a:r>
+          </a:p>
+          <a:p>
+            <a:pPr>
+              <a:spcAft>
+                <a:spcPts val="1000"/>
+              </a:spcAft>
+              <a:buChar char="•"/>
+              <a:lnSpc>
+                <a:spcPts val="2200"/>
+              </a:lnSpc>
+            </a:pPr>
+            <a:r>
+              <a:rPr sz="2000" b="0">
+                <a:solidFill>
+                  <a:srgbClr val="333333"/>
+                </a:solidFill>
+                <a:latin typeface="Calibri"/>
+              </a:rPr>
+              <a:t>Everyday tables lean on CSV and SQL</a:t>
+            </a:r>
+          </a:p>
+        </p:txBody>
+      </p:sp>
+      <p:sp>
+        <p:nvSpPr>
+          <p:cNvPr id="4" name="TextBox 3"/>
+          <p:cNvSpPr txBox="1"/>
+          <p:nvPr/>
+        </p:nvSpPr>
+        <p:spPr>
+          <a:xfrm>
+            <a:off x="548640" y="6355080"/>
+            <a:ext cx="11064240" cy="320040"/>
+          </a:xfrm>
+          <a:prstGeom prst="rect">
+            <a:avLst/>
+          </a:prstGeom>
+          <a:noFill/>
+        </p:spPr>
+        <p:txBody>
+          <a:bodyPr wrap="square">
+            <a:noAutofit/>
+          </a:bodyPr>
+          <a:lstStyle/>
+          <a:p>
+            <a:pPr algn="r">
+              <a:lnSpc>
+                <a:spcPts val="2200"/>
+              </a:lnSpc>
+              <a:defRPr sz="1000" b="0">
+                <a:solidFill>
+                  <a:srgbClr val="666666"/>
+                </a:solidFill>
+                <a:latin typeface="Calibri"/>
+              </a:defRPr>
+            </a:pPr>
+            <a:r>
+              <a:t>Chapter 1 — 03 Dataset Formats</a:t>
+            </a:r>
+          </a:p>
+        </p:txBody>
+      </p:sp>
+    </p:spTree>
+  </p:cSld>
+  <p:clrMapOvr>
+    <a:masterClrMapping/>
+  </p:clrMapOvr>
+</p:sld>
+</file>
+
+<file path=ppt/slides/slide11.xml><?xml version="1.0" encoding="utf-8"?>
+<p:sld xmlns:a="http://schemas.openxmlformats.org/drawingml/2006/main" xmlns:p="http://schemas.openxmlformats.org/presentationml/2006/main" xmlns:r="http://schemas.openxmlformats.org/officeDocument/2006/relationships">
+  <p:cSld>
+    <p:spTree>
+      <p:nvGrpSpPr>
+        <p:cNvPr id="1" name=""/>
+        <p:cNvGrpSpPr/>
+        <p:nvPr/>
+      </p:nvGrpSpPr>
+      <p:grpSpPr/>
+      <p:sp>
+        <p:nvSpPr>
+          <p:cNvPr id="2" name="TextBox 1"/>
+          <p:cNvSpPr txBox="1"/>
+          <p:nvPr/>
+        </p:nvSpPr>
+        <p:spPr>
+          <a:xfrm>
+            <a:off x="548640" y="411480"/>
+            <a:ext cx="11064240" cy="777240"/>
+          </a:xfrm>
+          <a:prstGeom prst="rect">
+            <a:avLst/>
+          </a:prstGeom>
+          <a:noFill/>
+        </p:spPr>
+        <p:txBody>
+          <a:bodyPr wrap="square">
+            <a:noAutofit/>
+          </a:bodyPr>
+          <a:lstStyle/>
+          <a:p>
+            <a:pPr>
+              <a:lnSpc>
+                <a:spcPts val="2200"/>
+              </a:lnSpc>
+            </a:pPr>
+            <a:r>
+              <a:rPr sz="2800" b="1">
+                <a:solidFill>
+                  <a:srgbClr val="1A1A2E"/>
+                </a:solidFill>
+                <a:latin typeface="Calibri"/>
+              </a:rPr>
+              <a:t>Next</a:t>
+            </a:r>
+          </a:p>
+        </p:txBody>
+      </p:sp>
+      <p:sp>
+        <p:nvSpPr>
+          <p:cNvPr id="3" name="TextBox 2"/>
+          <p:cNvSpPr txBox="1"/>
+          <p:nvPr/>
+        </p:nvSpPr>
+        <p:spPr>
+          <a:xfrm>
+            <a:off x="548640" y="1234440"/>
+            <a:ext cx="11064240" cy="4937760"/>
+          </a:xfrm>
+          <a:prstGeom prst="rect">
+            <a:avLst/>
+          </a:prstGeom>
+          <a:noFill/>
+        </p:spPr>
+        <p:txBody>
+          <a:bodyPr wrap="square">
+            <a:noAutofit/>
+          </a:bodyPr>
+          <a:lstStyle/>
+          <a:p>
+            <a:pPr>
+              <a:spcAft>
+                <a:spcPts val="1000"/>
+              </a:spcAft>
+              <a:buChar char="•"/>
+              <a:lnSpc>
+                <a:spcPts val="2200"/>
+              </a:lnSpc>
+            </a:pPr>
+            <a:r>
+              <a:rPr sz="2000" b="0">
+                <a:solidFill>
+                  <a:srgbClr val="333333"/>
+                </a:solidFill>
+                <a:latin typeface="Calibri"/>
+              </a:rPr>
+              <a:t>Complete the quiz for this clip</a:t>
+            </a:r>
+          </a:p>
+          <a:p>
+            <a:pPr>
+              <a:spcAft>
+                <a:spcPts val="1000"/>
+              </a:spcAft>
+              <a:buChar char="•"/>
+              <a:lnSpc>
+                <a:spcPts val="2200"/>
+              </a:lnSpc>
+            </a:pPr>
+            <a:r>
+              <a:rPr sz="2000" b="0">
+                <a:solidFill>
+                  <a:srgbClr val="333333"/>
+                </a:solidFill>
+                <a:latin typeface="Calibri"/>
+              </a:rPr>
+              <a:t>Complete the quiz, then move to characteristics of good datasets, accuracy, completeness</a:t>
+            </a:r>
+          </a:p>
+        </p:txBody>
+      </p:sp>
+      <p:sp>
+        <p:nvSpPr>
+          <p:cNvPr id="4" name="TextBox 3"/>
+          <p:cNvSpPr txBox="1"/>
+          <p:nvPr/>
+        </p:nvSpPr>
+        <p:spPr>
+          <a:xfrm>
+            <a:off x="548640" y="6355080"/>
+            <a:ext cx="11064240" cy="320040"/>
+          </a:xfrm>
+          <a:prstGeom prst="rect">
+            <a:avLst/>
+          </a:prstGeom>
+          <a:noFill/>
+        </p:spPr>
+        <p:txBody>
+          <a:bodyPr wrap="square">
+            <a:noAutofit/>
+          </a:bodyPr>
+          <a:lstStyle/>
+          <a:p>
+            <a:pPr algn="r">
+              <a:lnSpc>
+                <a:spcPts val="2200"/>
+              </a:lnSpc>
+              <a:defRPr sz="1000" b="0">
+                <a:solidFill>
+                  <a:srgbClr val="666666"/>
+                </a:solidFill>
+                <a:latin typeface="Calibri"/>
+              </a:defRPr>
+            </a:pPr>
+            <a:r>
+              <a:t>Chapter 1 — 03 Dataset Formats</a:t>
             </a:r>
           </a:p>
         </p:txBody>
@@ -3785,12 +4576,13 @@
           <a:lstStyle/>
           <a:p>
             <a:pPr>
-              <a:lnSpc>
-                <a:spcPts val="2200"/>
-              </a:lnSpc>
               <a:spcAft>
                 <a:spcPts val="1000"/>
               </a:spcAft>
+              <a:buChar char="•"/>
+              <a:lnSpc>
+                <a:spcPts val="2200"/>
+              </a:lnSpc>
             </a:pPr>
             <a:r>
               <a:rPr sz="2000" b="0">
@@ -3799,17 +4591,18 @@
                 </a:solidFill>
                 <a:latin typeface="Calibri"/>
               </a:rPr>
-              <a:t>• Name common formats for tabular, hierarchical, and</a:t>
+              <a:t>Leave able to name formats for tabular, hierarchical</a:t>
             </a:r>
           </a:p>
           <a:p>
             <a:pPr>
-              <a:lnSpc>
-                <a:spcPts val="2200"/>
-              </a:lnSpc>
               <a:spcAft>
                 <a:spcPts val="1000"/>
               </a:spcAft>
+              <a:buChar char="•"/>
+              <a:lnSpc>
+                <a:spcPts val="2200"/>
+              </a:lnSpc>
             </a:pPr>
             <a:r>
               <a:rPr sz="2000" b="0">
@@ -3818,17 +4611,18 @@
                 </a:solidFill>
                 <a:latin typeface="Calibri"/>
               </a:rPr>
-              <a:t>      geospatial data</a:t>
+              <a:t>Geospatial data, explain when CSV, SQL, HDF5, or GeoJSON fits</a:t>
             </a:r>
           </a:p>
           <a:p>
             <a:pPr>
-              <a:lnSpc>
-                <a:spcPts val="2200"/>
-              </a:lnSpc>
               <a:spcAft>
                 <a:spcPts val="1000"/>
               </a:spcAft>
+              <a:buChar char="•"/>
+              <a:lnSpc>
+                <a:spcPts val="2200"/>
+              </a:lnSpc>
             </a:pPr>
             <a:r>
               <a:rPr sz="2000" b="0">
@@ -3837,26 +4631,7 @@
                 </a:solidFill>
                 <a:latin typeface="Calibri"/>
               </a:rPr>
-              <a:t>• Explain when CSV, SQL, HDF5, or GeoJSON is a fit</a:t>
-            </a:r>
-          </a:p>
-          <a:p>
-            <a:pPr>
-              <a:lnSpc>
-                <a:spcPts val="2200"/>
-              </a:lnSpc>
-              <a:spcAft>
-                <a:spcPts val="1000"/>
-              </a:spcAft>
-            </a:pPr>
-            <a:r>
-              <a:rPr sz="2000" b="0">
-                <a:solidFill>
-                  <a:srgbClr val="333333"/>
-                </a:solidFill>
-                <a:latin typeface="Calibri"/>
-              </a:rPr>
-              <a:t>• Link format choice to downstream tooling</a:t>
+              <a:t>Connect format choice to the tools that will consume the data</a:t>
             </a:r>
           </a:p>
         </p:txBody>
@@ -3895,7 +4670,7 @@
               </a:defRPr>
             </a:pPr>
             <a:r>
-              <a:t>Chapter 1 — Dataset Formats</a:t>
+              <a:t>Chapter 1 — 03 Dataset Formats</a:t>
             </a:r>
           </a:p>
         </p:txBody>
@@ -3980,12 +4755,13 @@
           <a:lstStyle/>
           <a:p>
             <a:pPr>
-              <a:lnSpc>
-                <a:spcPts val="2200"/>
-              </a:lnSpc>
               <a:spcAft>
                 <a:spcPts val="1000"/>
               </a:spcAft>
+              <a:buChar char="•"/>
+              <a:lnSpc>
+                <a:spcPts val="2200"/>
+              </a:lnSpc>
             </a:pPr>
             <a:r>
               <a:rPr sz="2000" b="0">
@@ -3994,17 +4770,18 @@
                 </a:solidFill>
                 <a:latin typeface="Calibri"/>
               </a:rPr>
-              <a:t>• Format is how structure is serialized on disk</a:t>
+              <a:t>Format is the serialization of structure</a:t>
             </a:r>
           </a:p>
           <a:p>
             <a:pPr>
-              <a:lnSpc>
-                <a:spcPts val="2200"/>
-              </a:lnSpc>
               <a:spcAft>
                 <a:spcPts val="1000"/>
               </a:spcAft>
+              <a:buChar char="•"/>
+              <a:lnSpc>
+                <a:spcPts val="2200"/>
+              </a:lnSpc>
             </a:pPr>
             <a:r>
               <a:rPr sz="2000" b="0">
@@ -4013,17 +4790,18 @@
                 </a:solidFill>
                 <a:latin typeface="Calibri"/>
               </a:rPr>
-              <a:t>• Wrong format creates friction in the pipeline</a:t>
+              <a:t>Matching format to structure, expected volume</a:t>
             </a:r>
           </a:p>
           <a:p>
             <a:pPr>
-              <a:lnSpc>
-                <a:spcPts val="2200"/>
-              </a:lnSpc>
               <a:spcAft>
                 <a:spcPts val="1000"/>
               </a:spcAft>
+              <a:buChar char="•"/>
+              <a:lnSpc>
+                <a:spcPts val="2200"/>
+              </a:lnSpc>
             </a:pPr>
             <a:r>
               <a:rPr sz="2000" b="0">
@@ -4032,26 +4810,7 @@
                 </a:solidFill>
                 <a:latin typeface="Calibri"/>
               </a:rPr>
-              <a:t>• Match format to structure, volume, and tools</a:t>
-            </a:r>
-          </a:p>
-          <a:p>
-            <a:pPr>
-              <a:lnSpc>
-                <a:spcPts val="2200"/>
-              </a:lnSpc>
-              <a:spcAft>
-                <a:spcPts val="1000"/>
-              </a:spcAft>
-            </a:pPr>
-            <a:r>
-              <a:rPr sz="2000" b="0">
-                <a:solidFill>
-                  <a:srgbClr val="333333"/>
-                </a:solidFill>
-                <a:latin typeface="Calibri"/>
-              </a:rPr>
-              <a:t>• Complements the type taxonomy from the previous clip</a:t>
+              <a:t>A mismatch, for example, forcing huge arrays through naive CSV, creates avoidable cost</a:t>
             </a:r>
           </a:p>
         </p:txBody>
@@ -4090,7 +4849,7 @@
               </a:defRPr>
             </a:pPr>
             <a:r>
-              <a:t>Chapter 1 — Dataset Formats</a:t>
+              <a:t>Chapter 1 — 03 Dataset Formats</a:t>
             </a:r>
           </a:p>
         </p:txBody>
@@ -4175,12 +4934,13 @@
           <a:lstStyle/>
           <a:p>
             <a:pPr>
-              <a:lnSpc>
-                <a:spcPts val="2200"/>
-              </a:lnSpc>
               <a:spcAft>
                 <a:spcPts val="1000"/>
               </a:spcAft>
+              <a:buChar char="•"/>
+              <a:lnSpc>
+                <a:spcPts val="2200"/>
+              </a:lnSpc>
             </a:pPr>
             <a:r>
               <a:rPr sz="2000" b="0">
@@ -4189,35 +4949,18 @@
                 </a:solidFill>
                 <a:latin typeface="Calibri"/>
               </a:rPr>
-              <a:t>• </a:t>
-            </a:r>
-            <a:r>
-              <a:rPr sz="2000" b="1">
-                <a:solidFill>
-                  <a:srgbClr val="333333"/>
-                </a:solidFill>
-                <a:latin typeface="Calibri"/>
-              </a:rPr>
-              <a:t>CSV</a:t>
-            </a:r>
-            <a:r>
-              <a:rPr sz="2000" b="0">
-                <a:solidFill>
-                  <a:srgbClr val="333333"/>
-                </a:solidFill>
-                <a:latin typeface="Calibri"/>
-              </a:rPr>
-              <a:t> — simple tabular exchange</a:t>
+              <a:t>CSV remains the common language for simple tables</a:t>
             </a:r>
           </a:p>
           <a:p>
             <a:pPr>
-              <a:lnSpc>
-                <a:spcPts val="2200"/>
-              </a:lnSpc>
               <a:spcAft>
                 <a:spcPts val="1000"/>
               </a:spcAft>
+              <a:buChar char="•"/>
+              <a:lnSpc>
+                <a:spcPts val="2200"/>
+              </a:lnSpc>
             </a:pPr>
             <a:r>
               <a:rPr sz="2000" b="0">
@@ -4226,35 +4969,18 @@
                 </a:solidFill>
                 <a:latin typeface="Calibri"/>
               </a:rPr>
-              <a:t>• </a:t>
-            </a:r>
-            <a:r>
-              <a:rPr sz="2000" b="1">
-                <a:solidFill>
-                  <a:srgbClr val="333333"/>
-                </a:solidFill>
-                <a:latin typeface="Calibri"/>
-              </a:rPr>
-              <a:t>SQL tables</a:t>
-            </a:r>
-            <a:r>
-              <a:rPr sz="2000" b="0">
-                <a:solidFill>
-                  <a:srgbClr val="333333"/>
-                </a:solidFill>
-                <a:latin typeface="Calibri"/>
-              </a:rPr>
-              <a:t> — queryable structured stores</a:t>
+              <a:t>SQL tables add typed schemas and efficient queries</a:t>
             </a:r>
           </a:p>
           <a:p>
             <a:pPr>
-              <a:lnSpc>
-                <a:spcPts val="2200"/>
-              </a:lnSpc>
               <a:spcAft>
                 <a:spcPts val="1000"/>
               </a:spcAft>
+              <a:buChar char="•"/>
+              <a:lnSpc>
+                <a:spcPts val="2200"/>
+              </a:lnSpc>
             </a:pPr>
             <a:r>
               <a:rPr sz="2000" b="0">
@@ -4263,35 +4989,18 @@
                 </a:solidFill>
                 <a:latin typeface="Calibri"/>
               </a:rPr>
-              <a:t>• </a:t>
-            </a:r>
-            <a:r>
-              <a:rPr sz="2000" b="1">
-                <a:solidFill>
-                  <a:srgbClr val="333333"/>
-                </a:solidFill>
-                <a:latin typeface="Calibri"/>
-              </a:rPr>
-              <a:t>JSON / GeoJSON</a:t>
-            </a:r>
-            <a:r>
-              <a:rPr sz="2000" b="0">
-                <a:solidFill>
-                  <a:srgbClr val="333333"/>
-                </a:solidFill>
-                <a:latin typeface="Calibri"/>
-              </a:rPr>
-              <a:t> — nested or spatial features</a:t>
+              <a:t>JSON and GeoJSON handle nested objects and spatial features</a:t>
             </a:r>
           </a:p>
           <a:p>
             <a:pPr>
-              <a:lnSpc>
-                <a:spcPts val="2200"/>
-              </a:lnSpc>
               <a:spcAft>
                 <a:spcPts val="1000"/>
               </a:spcAft>
+              <a:buChar char="•"/>
+              <a:lnSpc>
+                <a:spcPts val="2200"/>
+              </a:lnSpc>
             </a:pPr>
             <a:r>
               <a:rPr sz="2000" b="0">
@@ -4300,25 +5009,27 @@
                 </a:solidFill>
                 <a:latin typeface="Calibri"/>
               </a:rPr>
-              <a:t>• </a:t>
-            </a:r>
-            <a:r>
-              <a:rPr sz="2000" b="1">
+              <a:t>HDF5 targets large scientific or array-oriented datasets</a:t>
+            </a:r>
+          </a:p>
+          <a:p>
+            <a:pPr>
+              <a:spcAft>
+                <a:spcPts val="1000"/>
+              </a:spcAft>
+              <a:buChar char="•"/>
+              <a:lnSpc>
+                <a:spcPts val="2200"/>
+              </a:lnSpc>
+            </a:pPr>
+            <a:r>
+              <a:rPr sz="2000" b="0">
                 <a:solidFill>
                   <a:srgbClr val="333333"/>
                 </a:solidFill>
                 <a:latin typeface="Calibri"/>
               </a:rPr>
-              <a:t>HDF5</a:t>
-            </a:r>
-            <a:r>
-              <a:rPr sz="2000" b="0">
-                <a:solidFill>
-                  <a:srgbClr val="333333"/>
-                </a:solidFill>
-                <a:latin typeface="Calibri"/>
-              </a:rPr>
-              <a:t> — large scientific / array datasets</a:t>
+              <a:t>Each aligns with a structural niche</a:t>
             </a:r>
           </a:p>
         </p:txBody>
@@ -4357,7 +5068,7 @@
               </a:defRPr>
             </a:pPr>
             <a:r>
-              <a:t>Chapter 1 — Dataset Formats</a:t>
+              <a:t>Chapter 1 — 03 Dataset Formats</a:t>
             </a:r>
           </a:p>
         </p:txBody>
@@ -4427,15 +5138,13 @@
         </p:nvSpPr>
         <p:spPr>
           <a:xfrm>
-            <a:off x="548640" y="1051560"/>
-            <a:ext cx="11064240" cy="914400"/>
+            <a:off x="548640" y="1234440"/>
+            <a:ext cx="11064240" cy="4937760"/>
           </a:xfrm>
           <a:prstGeom prst="rect">
             <a:avLst/>
           </a:prstGeom>
-          <a:solidFill>
-            <a:srgbClr val="F4F4F4"/>
-          </a:solidFill>
+          <a:noFill/>
         </p:spPr>
         <p:txBody>
           <a:bodyPr wrap="square">
@@ -4444,21 +5153,102 @@
           <a:lstStyle/>
           <a:p>
             <a:pPr>
-              <a:lnSpc>
-                <a:spcPts val="2200"/>
-              </a:lnSpc>
               <a:spcAft>
-                <a:spcPts val="200"/>
+                <a:spcPts val="1000"/>
               </a:spcAft>
+              <a:buChar char="•"/>
+              <a:lnSpc>
+                <a:spcPts val="2200"/>
+              </a:lnSpc>
             </a:pPr>
             <a:r>
               <a:rPr sz="2000" b="0">
                 <a:solidFill>
                   <a:srgbClr val="333333"/>
                 </a:solidFill>
-                <a:latin typeface="Consolas"/>
+                <a:latin typeface="Calibri"/>
               </a:rPr>
-              <a:t>$ cd modules/chapter1/example8/ &amp;&amp; bash run.sh</a:t>
+              <a:t>Example 1.8 — hands-on module</a:t>
+            </a:r>
+          </a:p>
+          <a:p>
+            <a:pPr>
+              <a:spcAft>
+                <a:spcPts val="1000"/>
+              </a:spcAft>
+              <a:buChar char="•"/>
+              <a:lnSpc>
+                <a:spcPts val="2200"/>
+              </a:lnSpc>
+            </a:pPr>
+            <a:r>
+              <a:rPr sz="2000" b="0">
+                <a:solidFill>
+                  <a:srgbClr val="333333"/>
+                </a:solidFill>
+                <a:latin typeface="Calibri"/>
+              </a:rPr>
+              <a:t>Example 1.8 shows structured data in a relational form</a:t>
+            </a:r>
+          </a:p>
+          <a:p>
+            <a:pPr>
+              <a:spcAft>
+                <a:spcPts val="1000"/>
+              </a:spcAft>
+              <a:buChar char="•"/>
+              <a:lnSpc>
+                <a:spcPts val="2200"/>
+              </a:lnSpc>
+            </a:pPr>
+            <a:r>
+              <a:rPr sz="2000" b="0">
+                <a:solidFill>
+                  <a:srgbClr val="333333"/>
+                </a:solidFill>
+                <a:latin typeface="Calibri"/>
+              </a:rPr>
+              <a:t>When attributes are stable and analysts need aggregations</a:t>
+            </a:r>
+          </a:p>
+          <a:p>
+            <a:pPr>
+              <a:spcAft>
+                <a:spcPts val="1000"/>
+              </a:spcAft>
+              <a:buChar char="•"/>
+              <a:lnSpc>
+                <a:spcPts val="2200"/>
+              </a:lnSpc>
+            </a:pPr>
+            <a:r>
+              <a:rPr sz="2000" b="0">
+                <a:solidFill>
+                  <a:srgbClr val="333333"/>
+                </a:solidFill>
+                <a:latin typeface="Calibri"/>
+              </a:rPr>
+              <a:t>Explore the chapter example module</a:t>
+            </a:r>
+          </a:p>
+          <a:p>
+            <a:pPr>
+              <a:spcAft>
+                <a:spcPts val="1000"/>
+              </a:spcAft>
+              <a:buChar char="•"/>
+              <a:lnSpc>
+                <a:spcPts val="2200"/>
+              </a:lnSpc>
+            </a:pPr>
+            <a:r>
+              <a:rPr sz="2000" b="0">
+                <a:solidFill>
+                  <a:srgbClr val="333333"/>
+                </a:solidFill>
+                <a:latin typeface="Calibri"/>
+              </a:rPr>
+              <a:t>View files: `modules/chapter1/example8/`</a:t>
             </a:r>
           </a:p>
         </p:txBody>
@@ -4497,7 +5287,7 @@
               </a:defRPr>
             </a:pPr>
             <a:r>
-              <a:t>Chapter 1 — Dataset Formats</a:t>
+              <a:t>Chapter 1 — 03 Dataset Formats</a:t>
             </a:r>
           </a:p>
         </p:txBody>
@@ -4554,7 +5344,7 @@
                 </a:solidFill>
                 <a:latin typeface="Calibri"/>
               </a:rPr>
-              <a:t>Example 1.9 — HDF5</a:t>
+              <a:t>Example 1.8 — listing</a:t>
             </a:r>
           </a:p>
         </p:txBody>
@@ -4567,8 +5357,8 @@
         </p:nvSpPr>
         <p:spPr>
           <a:xfrm>
-            <a:off x="548640" y="1051560"/>
-            <a:ext cx="11064240" cy="914400"/>
+            <a:off x="548640" y="1143000"/>
+            <a:ext cx="11064240" cy="5029200"/>
           </a:xfrm>
           <a:prstGeom prst="rect">
             <a:avLst/>
@@ -4588,7 +5378,7 @@
                 <a:spcPts val="2200"/>
               </a:lnSpc>
               <a:spcAft>
-                <a:spcPts val="200"/>
+                <a:spcPts val="400"/>
               </a:spcAft>
             </a:pPr>
             <a:r>
@@ -4598,7 +5388,311 @@
                 </a:solidFill>
                 <a:latin typeface="Consolas"/>
               </a:rPr>
-              <a:t>$ cd modules/chapter1/example9/ &amp;&amp; bash run.sh</a:t>
+              <a:t>]</a:t>
+            </a:r>
+          </a:p>
+          <a:p>
+            <a:pPr>
+              <a:lnSpc>
+                <a:spcPts val="2200"/>
+              </a:lnSpc>
+              <a:spcAft>
+                <a:spcPts val="400"/>
+              </a:spcAft>
+            </a:pPr>
+            <a:r>
+              <a:rPr sz="2000" b="0">
+                <a:solidFill>
+                  <a:srgbClr val="333333"/>
+                </a:solidFill>
+                <a:latin typeface="Consolas"/>
+              </a:rPr>
+              <a:t>CREATE TABLE Customers (</a:t>
+            </a:r>
+          </a:p>
+          <a:p>
+            <a:pPr>
+              <a:lnSpc>
+                <a:spcPts val="2200"/>
+              </a:lnSpc>
+              <a:spcAft>
+                <a:spcPts val="400"/>
+              </a:spcAft>
+            </a:pPr>
+            <a:r>
+              <a:rPr sz="2000" b="0">
+                <a:solidFill>
+                  <a:srgbClr val="333333"/>
+                </a:solidFill>
+                <a:latin typeface="Consolas"/>
+              </a:rPr>
+              <a:t>    customer_id SERIAL PRIMARY KEY,</a:t>
+            </a:r>
+          </a:p>
+          <a:p>
+            <a:pPr>
+              <a:lnSpc>
+                <a:spcPts val="2200"/>
+              </a:lnSpc>
+              <a:spcAft>
+                <a:spcPts val="400"/>
+              </a:spcAft>
+            </a:pPr>
+            <a:r>
+              <a:rPr sz="2000" b="0">
+                <a:solidFill>
+                  <a:srgbClr val="333333"/>
+                </a:solidFill>
+                <a:latin typeface="Consolas"/>
+              </a:rPr>
+              <a:t>    name VARCHAR(100) NOT NULL,</a:t>
+            </a:r>
+          </a:p>
+          <a:p>
+            <a:pPr>
+              <a:lnSpc>
+                <a:spcPts val="2200"/>
+              </a:lnSpc>
+              <a:spcAft>
+                <a:spcPts val="400"/>
+              </a:spcAft>
+            </a:pPr>
+            <a:r>
+              <a:rPr sz="2000" b="0">
+                <a:solidFill>
+                  <a:srgbClr val="333333"/>
+                </a:solidFill>
+                <a:latin typeface="Consolas"/>
+              </a:rPr>
+              <a:t>    email VARCHAR(100) UNIQUE NOT NULL</a:t>
+            </a:r>
+          </a:p>
+          <a:p>
+            <a:pPr>
+              <a:lnSpc>
+                <a:spcPts val="2200"/>
+              </a:lnSpc>
+              <a:spcAft>
+                <a:spcPts val="400"/>
+              </a:spcAft>
+            </a:pPr>
+            <a:r>
+              <a:rPr sz="2000" b="0">
+                <a:solidFill>
+                  <a:srgbClr val="333333"/>
+                </a:solidFill>
+                <a:latin typeface="Consolas"/>
+              </a:rPr>
+              <a:t>);</a:t>
+            </a:r>
+          </a:p>
+          <a:p>
+            <a:pPr>
+              <a:lnSpc>
+                <a:spcPts val="2200"/>
+              </a:lnSpc>
+              <a:spcAft>
+                <a:spcPts val="400"/>
+              </a:spcAft>
+            </a:pPr>
+            <a:r>
+              <a:rPr sz="2000" b="0">
+                <a:solidFill>
+                  <a:srgbClr val="333333"/>
+                </a:solidFill>
+                <a:latin typeface="Consolas"/>
+              </a:rPr>
+              <a:t/>
+            </a:r>
+          </a:p>
+          <a:p>
+            <a:pPr>
+              <a:lnSpc>
+                <a:spcPts val="2200"/>
+              </a:lnSpc>
+              <a:spcAft>
+                <a:spcPts val="400"/>
+              </a:spcAft>
+            </a:pPr>
+            <a:r>
+              <a:rPr sz="2000" b="0">
+                <a:solidFill>
+                  <a:srgbClr val="333333"/>
+                </a:solidFill>
+                <a:latin typeface="Consolas"/>
+              </a:rPr>
+              <a:t>CREATE TABLE Orders (</a:t>
+            </a:r>
+          </a:p>
+          <a:p>
+            <a:pPr>
+              <a:lnSpc>
+                <a:spcPts val="2200"/>
+              </a:lnSpc>
+              <a:spcAft>
+                <a:spcPts val="400"/>
+              </a:spcAft>
+            </a:pPr>
+            <a:r>
+              <a:rPr sz="2000" b="0">
+                <a:solidFill>
+                  <a:srgbClr val="333333"/>
+                </a:solidFill>
+                <a:latin typeface="Consolas"/>
+              </a:rPr>
+              <a:t>    order_id SERIAL PRIMARY KEY,</a:t>
+            </a:r>
+          </a:p>
+          <a:p>
+            <a:pPr>
+              <a:lnSpc>
+                <a:spcPts val="2200"/>
+              </a:lnSpc>
+              <a:spcAft>
+                <a:spcPts val="400"/>
+              </a:spcAft>
+            </a:pPr>
+            <a:r>
+              <a:rPr sz="2000" b="0">
+                <a:solidFill>
+                  <a:srgbClr val="333333"/>
+                </a:solidFill>
+                <a:latin typeface="Consolas"/>
+              </a:rPr>
+              <a:t>    customer_id INT NOT NULL,</a:t>
+            </a:r>
+          </a:p>
+          <a:p>
+            <a:pPr>
+              <a:lnSpc>
+                <a:spcPts val="2200"/>
+              </a:lnSpc>
+              <a:spcAft>
+                <a:spcPts val="400"/>
+              </a:spcAft>
+            </a:pPr>
+            <a:r>
+              <a:rPr sz="2000" b="0">
+                <a:solidFill>
+                  <a:srgbClr val="333333"/>
+                </a:solidFill>
+                <a:latin typeface="Consolas"/>
+              </a:rPr>
+              <a:t>    order_date TIMESTAMP DEFAULT CURRENT_TIMESTAMP,</a:t>
+            </a:r>
+          </a:p>
+          <a:p>
+            <a:pPr>
+              <a:lnSpc>
+                <a:spcPts val="2200"/>
+              </a:lnSpc>
+              <a:spcAft>
+                <a:spcPts val="400"/>
+              </a:spcAft>
+            </a:pPr>
+            <a:r>
+              <a:rPr sz="2000" b="0">
+                <a:solidFill>
+                  <a:srgbClr val="333333"/>
+                </a:solidFill>
+                <a:latin typeface="Consolas"/>
+              </a:rPr>
+              <a:t>    total_amount DECIMAL(10,2),</a:t>
+            </a:r>
+          </a:p>
+          <a:p>
+            <a:pPr>
+              <a:lnSpc>
+                <a:spcPts val="2200"/>
+              </a:lnSpc>
+              <a:spcAft>
+                <a:spcPts val="400"/>
+              </a:spcAft>
+            </a:pPr>
+            <a:r>
+              <a:rPr sz="2000" b="0">
+                <a:solidFill>
+                  <a:srgbClr val="333333"/>
+                </a:solidFill>
+                <a:latin typeface="Consolas"/>
+              </a:rPr>
+              <a:t>    FOREIGN KEY (customer_id) REFERENCES Customers(customer_id)</a:t>
+            </a:r>
+          </a:p>
+          <a:p>
+            <a:pPr>
+              <a:lnSpc>
+                <a:spcPts val="2200"/>
+              </a:lnSpc>
+              <a:spcAft>
+                <a:spcPts val="400"/>
+              </a:spcAft>
+            </a:pPr>
+            <a:r>
+              <a:rPr sz="2000" b="0">
+                <a:solidFill>
+                  <a:srgbClr val="333333"/>
+                </a:solidFill>
+                <a:latin typeface="Consolas"/>
+              </a:rPr>
+              <a:t>);</a:t>
+            </a:r>
+          </a:p>
+          <a:p>
+            <a:pPr>
+              <a:lnSpc>
+                <a:spcPts val="2200"/>
+              </a:lnSpc>
+              <a:spcAft>
+                <a:spcPts val="400"/>
+              </a:spcAft>
+            </a:pPr>
+            <a:r>
+              <a:rPr sz="2000" b="0">
+                <a:solidFill>
+                  <a:srgbClr val="333333"/>
+                </a:solidFill>
+                <a:latin typeface="Consolas"/>
+              </a:rPr>
+              <a:t/>
+            </a:r>
+          </a:p>
+          <a:p>
+            <a:pPr>
+              <a:lnSpc>
+                <a:spcPts val="2200"/>
+              </a:lnSpc>
+              <a:spcAft>
+                <a:spcPts val="400"/>
+              </a:spcAft>
+            </a:pPr>
+            <a:r>
+              <a:rPr sz="2000" b="0">
+                <a:solidFill>
+                  <a:srgbClr val="333333"/>
+                </a:solidFill>
+                <a:latin typeface="Consolas"/>
+              </a:rPr>
+              <a:t>CREATE TABLE Order_Items (</a:t>
+            </a:r>
+          </a:p>
+          <a:p>
+            <a:pPr>
+              <a:lnSpc>
+                <a:spcPts val="2200"/>
+              </a:lnSpc>
+              <a:spcAft>
+                <a:spcPts val="400"/>
+              </a:spcAft>
+            </a:pPr>
+            <a:r>
+              <a:rPr sz="2000" b="0">
+                <a:solidFill>
+                  <a:srgbClr val="333333"/>
+                </a:solidFill>
+                <a:latin typeface="Consolas"/>
+              </a:rPr>
+              <a:t># ...</a:t>
             </a:r>
           </a:p>
         </p:txBody>
@@ -4637,7 +5731,7 @@
               </a:defRPr>
             </a:pPr>
             <a:r>
-              <a:t>Chapter 1 — Dataset Formats</a:t>
+              <a:t>Chapter 1 — 03 Dataset Formats</a:t>
             </a:r>
           </a:p>
         </p:txBody>
@@ -4694,7 +5788,7 @@
                 </a:solidFill>
                 <a:latin typeface="Calibri"/>
               </a:rPr>
-              <a:t>Choosing a format</a:t>
+              <a:t>Example 1.9 — HDF5</a:t>
             </a:r>
           </a:p>
         </p:txBody>
@@ -4722,12 +5816,13 @@
           <a:lstStyle/>
           <a:p>
             <a:pPr>
-              <a:lnSpc>
-                <a:spcPts val="2200"/>
-              </a:lnSpc>
               <a:spcAft>
                 <a:spcPts val="1000"/>
               </a:spcAft>
+              <a:buChar char="•"/>
+              <a:lnSpc>
+                <a:spcPts val="2200"/>
+              </a:lnSpc>
             </a:pPr>
             <a:r>
               <a:rPr sz="2000" b="0">
@@ -4736,17 +5831,18 @@
                 </a:solidFill>
                 <a:latin typeface="Calibri"/>
               </a:rPr>
-              <a:t>• Start from structure (tabular vs nested vs spatial)</a:t>
+              <a:t>Example 1.9 — hands-on module</a:t>
             </a:r>
           </a:p>
           <a:p>
             <a:pPr>
-              <a:lnSpc>
-                <a:spcPts val="2200"/>
-              </a:lnSpc>
               <a:spcAft>
                 <a:spcPts val="1000"/>
               </a:spcAft>
+              <a:buChar char="•"/>
+              <a:lnSpc>
+                <a:spcPts val="2200"/>
+              </a:lnSpc>
             </a:pPr>
             <a:r>
               <a:rPr sz="2000" b="0">
@@ -4755,17 +5851,18 @@
                 </a:solidFill>
                 <a:latin typeface="Calibri"/>
               </a:rPr>
-              <a:t>• Consider size, update rate, and who will query it</a:t>
+              <a:t>Example 1.9 creates and reads an HDF5 file</a:t>
             </a:r>
           </a:p>
           <a:p>
             <a:pPr>
-              <a:lnSpc>
-                <a:spcPts val="2200"/>
-              </a:lnSpc>
               <a:spcAft>
                 <a:spcPts val="1000"/>
               </a:spcAft>
+              <a:buChar char="•"/>
+              <a:lnSpc>
+                <a:spcPts val="2200"/>
+              </a:lnSpc>
             </a:pPr>
             <a:r>
               <a:rPr sz="2000" b="0">
@@ -4774,17 +5871,18 @@
                 </a:solidFill>
                 <a:latin typeface="Calibri"/>
               </a:rPr>
-              <a:t>• Prefer formats your stack already supports well</a:t>
+              <a:t>Scientific and machine-learning pipelines often prefer HDF5 when CSV becomes too slow or</a:t>
             </a:r>
           </a:p>
           <a:p>
             <a:pPr>
-              <a:lnSpc>
-                <a:spcPts val="2200"/>
-              </a:lnSpc>
               <a:spcAft>
                 <a:spcPts val="1000"/>
               </a:spcAft>
+              <a:buChar char="•"/>
+              <a:lnSpc>
+                <a:spcPts val="2200"/>
+              </a:lnSpc>
             </a:pPr>
             <a:r>
               <a:rPr sz="2000" b="0">
@@ -4793,17 +5891,18 @@
                 </a:solidFill>
                 <a:latin typeface="Calibri"/>
               </a:rPr>
-              <a:t>• Document the choice in metadata (next quality</a:t>
+              <a:t>Explore the chapter example module</a:t>
             </a:r>
           </a:p>
           <a:p>
             <a:pPr>
-              <a:lnSpc>
-                <a:spcPts val="2200"/>
-              </a:lnSpc>
               <a:spcAft>
                 <a:spcPts val="1000"/>
               </a:spcAft>
+              <a:buChar char="•"/>
+              <a:lnSpc>
+                <a:spcPts val="2200"/>
+              </a:lnSpc>
             </a:pPr>
             <a:r>
               <a:rPr sz="2000" b="0">
@@ -4812,7 +5911,7 @@
                 </a:solidFill>
                 <a:latin typeface="Calibri"/>
               </a:rPr>
-              <a:t>      topics)</a:t>
+              <a:t>View files: `modules/chapter1/example9/`</a:t>
             </a:r>
           </a:p>
         </p:txBody>
@@ -4851,7 +5950,7 @@
               </a:defRPr>
             </a:pPr>
             <a:r>
-              <a:t>Chapter 1 — Dataset Formats</a:t>
+              <a:t>Chapter 1 — 03 Dataset Formats</a:t>
             </a:r>
           </a:p>
         </p:txBody>
@@ -4908,7 +6007,394 @@
                 </a:solidFill>
                 <a:latin typeface="Calibri"/>
               </a:rPr>
-              <a:t>Takeaways</a:t>
+              <a:t>Example 1.9 — listing</a:t>
+            </a:r>
+          </a:p>
+        </p:txBody>
+      </p:sp>
+      <p:sp>
+        <p:nvSpPr>
+          <p:cNvPr id="3" name="TextBox 2"/>
+          <p:cNvSpPr txBox="1"/>
+          <p:nvPr/>
+        </p:nvSpPr>
+        <p:spPr>
+          <a:xfrm>
+            <a:off x="548640" y="1143000"/>
+            <a:ext cx="11064240" cy="5029200"/>
+          </a:xfrm>
+          <a:prstGeom prst="rect">
+            <a:avLst/>
+          </a:prstGeom>
+          <a:solidFill>
+            <a:srgbClr val="F4F4F4"/>
+          </a:solidFill>
+        </p:spPr>
+        <p:txBody>
+          <a:bodyPr wrap="square">
+            <a:noAutofit/>
+          </a:bodyPr>
+          <a:lstStyle/>
+          <a:p>
+            <a:pPr>
+              <a:lnSpc>
+                <a:spcPts val="2200"/>
+              </a:lnSpc>
+              <a:spcAft>
+                <a:spcPts val="400"/>
+              </a:spcAft>
+            </a:pPr>
+            <a:r>
+              <a:rPr sz="2000" b="0">
+                <a:solidFill>
+                  <a:srgbClr val="333333"/>
+                </a:solidFill>
+                <a:latin typeface="Consolas"/>
+              </a:rPr>
+              <a:t>import h5py</a:t>
+            </a:r>
+          </a:p>
+          <a:p>
+            <a:pPr>
+              <a:lnSpc>
+                <a:spcPts val="2200"/>
+              </a:lnSpc>
+              <a:spcAft>
+                <a:spcPts val="400"/>
+              </a:spcAft>
+            </a:pPr>
+            <a:r>
+              <a:rPr sz="2000" b="0">
+                <a:solidFill>
+                  <a:srgbClr val="333333"/>
+                </a:solidFill>
+                <a:latin typeface="Consolas"/>
+              </a:rPr>
+              <a:t>import numpy as np</a:t>
+            </a:r>
+          </a:p>
+          <a:p>
+            <a:pPr>
+              <a:lnSpc>
+                <a:spcPts val="2200"/>
+              </a:lnSpc>
+              <a:spcAft>
+                <a:spcPts val="400"/>
+              </a:spcAft>
+            </a:pPr>
+            <a:r>
+              <a:rPr sz="2000" b="0">
+                <a:solidFill>
+                  <a:srgbClr val="333333"/>
+                </a:solidFill>
+                <a:latin typeface="Consolas"/>
+              </a:rPr>
+              <a:t/>
+            </a:r>
+          </a:p>
+          <a:p>
+            <a:pPr>
+              <a:lnSpc>
+                <a:spcPts val="2200"/>
+              </a:lnSpc>
+              <a:spcAft>
+                <a:spcPts val="400"/>
+              </a:spcAft>
+            </a:pPr>
+            <a:r>
+              <a:rPr sz="2000" b="0">
+                <a:solidFill>
+                  <a:srgbClr val="333333"/>
+                </a:solidFill>
+                <a:latin typeface="Consolas"/>
+              </a:rPr>
+              <a:t>with h5py.File("example.h5", "w") as hdf:</a:t>
+            </a:r>
+          </a:p>
+          <a:p>
+            <a:pPr>
+              <a:lnSpc>
+                <a:spcPts val="2200"/>
+              </a:lnSpc>
+              <a:spcAft>
+                <a:spcPts val="400"/>
+              </a:spcAft>
+            </a:pPr>
+            <a:r>
+              <a:rPr sz="2000" b="0">
+                <a:solidFill>
+                  <a:srgbClr val="333333"/>
+                </a:solidFill>
+                <a:latin typeface="Consolas"/>
+              </a:rPr>
+              <a:t>    data = np.random.rand(100, 100)</a:t>
+            </a:r>
+          </a:p>
+          <a:p>
+            <a:pPr>
+              <a:lnSpc>
+                <a:spcPts val="2200"/>
+              </a:lnSpc>
+              <a:spcAft>
+                <a:spcPts val="400"/>
+              </a:spcAft>
+            </a:pPr>
+            <a:r>
+              <a:rPr sz="2000" b="0">
+                <a:solidFill>
+                  <a:srgbClr val="333333"/>
+                </a:solidFill>
+                <a:latin typeface="Consolas"/>
+              </a:rPr>
+              <a:t>    hdf.create_dataset("random_data", data=data)</a:t>
+            </a:r>
+          </a:p>
+          <a:p>
+            <a:pPr>
+              <a:lnSpc>
+                <a:spcPts val="2200"/>
+              </a:lnSpc>
+              <a:spcAft>
+                <a:spcPts val="400"/>
+              </a:spcAft>
+            </a:pPr>
+            <a:r>
+              <a:rPr sz="2000" b="0">
+                <a:solidFill>
+                  <a:srgbClr val="333333"/>
+                </a:solidFill>
+                <a:latin typeface="Consolas"/>
+              </a:rPr>
+              <a:t>    group = hdf.create_group("experiment")</a:t>
+            </a:r>
+          </a:p>
+          <a:p>
+            <a:pPr>
+              <a:lnSpc>
+                <a:spcPts val="2200"/>
+              </a:lnSpc>
+              <a:spcAft>
+                <a:spcPts val="400"/>
+              </a:spcAft>
+            </a:pPr>
+            <a:r>
+              <a:rPr sz="2000" b="0">
+                <a:solidFill>
+                  <a:srgbClr val="333333"/>
+                </a:solidFill>
+                <a:latin typeface="Consolas"/>
+              </a:rPr>
+              <a:t>    group.create_dataset("temperature", data=np.linspace(0, 100, 100))</a:t>
+            </a:r>
+          </a:p>
+          <a:p>
+            <a:pPr>
+              <a:lnSpc>
+                <a:spcPts val="2200"/>
+              </a:lnSpc>
+              <a:spcAft>
+                <a:spcPts val="400"/>
+              </a:spcAft>
+            </a:pPr>
+            <a:r>
+              <a:rPr sz="2000" b="0">
+                <a:solidFill>
+                  <a:srgbClr val="333333"/>
+                </a:solidFill>
+                <a:latin typeface="Consolas"/>
+              </a:rPr>
+              <a:t>    group.create_dataset("pressure", data=np.linspace(1, 10, 100))</a:t>
+            </a:r>
+          </a:p>
+          <a:p>
+            <a:pPr>
+              <a:lnSpc>
+                <a:spcPts val="2200"/>
+              </a:lnSpc>
+              <a:spcAft>
+                <a:spcPts val="400"/>
+              </a:spcAft>
+            </a:pPr>
+            <a:r>
+              <a:rPr sz="2000" b="0">
+                <a:solidFill>
+                  <a:srgbClr val="333333"/>
+                </a:solidFill>
+                <a:latin typeface="Consolas"/>
+              </a:rPr>
+              <a:t/>
+            </a:r>
+          </a:p>
+          <a:p>
+            <a:pPr>
+              <a:lnSpc>
+                <a:spcPts val="2200"/>
+              </a:lnSpc>
+              <a:spcAft>
+                <a:spcPts val="400"/>
+              </a:spcAft>
+            </a:pPr>
+            <a:r>
+              <a:rPr sz="2000" b="0">
+                <a:solidFill>
+                  <a:srgbClr val="333333"/>
+                </a:solidFill>
+                <a:latin typeface="Consolas"/>
+              </a:rPr>
+              <a:t>with h5py.File("example.h5", "r") as hdf:</a:t>
+            </a:r>
+          </a:p>
+          <a:p>
+            <a:pPr>
+              <a:lnSpc>
+                <a:spcPts val="2200"/>
+              </a:lnSpc>
+              <a:spcAft>
+                <a:spcPts val="400"/>
+              </a:spcAft>
+            </a:pPr>
+            <a:r>
+              <a:rPr sz="2000" b="0">
+                <a:solidFill>
+                  <a:srgbClr val="333333"/>
+                </a:solidFill>
+                <a:latin typeface="Consolas"/>
+              </a:rPr>
+              <a:t>    print("Datasets in root:", list(hdf.keys()))</a:t>
+            </a:r>
+          </a:p>
+          <a:p>
+            <a:pPr>
+              <a:lnSpc>
+                <a:spcPts val="2200"/>
+              </a:lnSpc>
+              <a:spcAft>
+                <a:spcPts val="400"/>
+              </a:spcAft>
+            </a:pPr>
+            <a:r>
+              <a:rPr sz="2000" b="0">
+                <a:solidFill>
+                  <a:srgbClr val="333333"/>
+                </a:solidFill>
+                <a:latin typeface="Consolas"/>
+              </a:rPr>
+              <a:t>    random_data = hdf["random_data"][:]</a:t>
+            </a:r>
+          </a:p>
+          <a:p>
+            <a:pPr>
+              <a:lnSpc>
+                <a:spcPts val="2200"/>
+              </a:lnSpc>
+              <a:spcAft>
+                <a:spcPts val="400"/>
+              </a:spcAft>
+            </a:pPr>
+            <a:r>
+              <a:rPr sz="2000" b="0">
+                <a:solidFill>
+                  <a:srgbClr val="333333"/>
+                </a:solidFill>
+                <a:latin typeface="Consolas"/>
+              </a:rPr>
+              <a:t>    print("Shape of 'random_data':", random_data.shape)</a:t>
+            </a:r>
+          </a:p>
+        </p:txBody>
+      </p:sp>
+      <p:sp>
+        <p:nvSpPr>
+          <p:cNvPr id="4" name="TextBox 3"/>
+          <p:cNvSpPr txBox="1"/>
+          <p:nvPr/>
+        </p:nvSpPr>
+        <p:spPr>
+          <a:xfrm>
+            <a:off x="548640" y="6355080"/>
+            <a:ext cx="11064240" cy="320040"/>
+          </a:xfrm>
+          <a:prstGeom prst="rect">
+            <a:avLst/>
+          </a:prstGeom>
+          <a:noFill/>
+        </p:spPr>
+        <p:txBody>
+          <a:bodyPr wrap="square">
+            <a:noAutofit/>
+          </a:bodyPr>
+          <a:lstStyle/>
+          <a:p>
+            <a:pPr algn="r">
+              <a:lnSpc>
+                <a:spcPts val="2200"/>
+              </a:lnSpc>
+              <a:defRPr sz="1000" b="0">
+                <a:solidFill>
+                  <a:srgbClr val="666666"/>
+                </a:solidFill>
+                <a:latin typeface="Calibri"/>
+              </a:defRPr>
+            </a:pPr>
+            <a:r>
+              <a:t>Chapter 1 — 03 Dataset Formats</a:t>
+            </a:r>
+          </a:p>
+        </p:txBody>
+      </p:sp>
+    </p:spTree>
+  </p:cSld>
+  <p:clrMapOvr>
+    <a:masterClrMapping/>
+  </p:clrMapOvr>
+</p:sld>
+</file>
+
+<file path=ppt/slides/slide9.xml><?xml version="1.0" encoding="utf-8"?>
+<p:sld xmlns:a="http://schemas.openxmlformats.org/drawingml/2006/main" xmlns:p="http://schemas.openxmlformats.org/presentationml/2006/main" xmlns:r="http://schemas.openxmlformats.org/officeDocument/2006/relationships">
+  <p:cSld>
+    <p:spTree>
+      <p:nvGrpSpPr>
+        <p:cNvPr id="1" name=""/>
+        <p:cNvGrpSpPr/>
+        <p:nvPr/>
+      </p:nvGrpSpPr>
+      <p:grpSpPr/>
+      <p:sp>
+        <p:nvSpPr>
+          <p:cNvPr id="2" name="TextBox 1"/>
+          <p:cNvSpPr txBox="1"/>
+          <p:nvPr/>
+        </p:nvSpPr>
+        <p:spPr>
+          <a:xfrm>
+            <a:off x="548640" y="411480"/>
+            <a:ext cx="11064240" cy="777240"/>
+          </a:xfrm>
+          <a:prstGeom prst="rect">
+            <a:avLst/>
+          </a:prstGeom>
+          <a:noFill/>
+        </p:spPr>
+        <p:txBody>
+          <a:bodyPr wrap="square">
+            <a:noAutofit/>
+          </a:bodyPr>
+          <a:lstStyle/>
+          <a:p>
+            <a:pPr>
+              <a:lnSpc>
+                <a:spcPts val="2200"/>
+              </a:lnSpc>
+            </a:pPr>
+            <a:r>
+              <a:rPr sz="2800" b="1">
+                <a:solidFill>
+                  <a:srgbClr val="1A1A2E"/>
+                </a:solidFill>
+                <a:latin typeface="Calibri"/>
+              </a:rPr>
+              <a:t>Choosing a format</a:t>
             </a:r>
           </a:p>
         </p:txBody>
@@ -4936,12 +6422,13 @@
           <a:lstStyle/>
           <a:p>
             <a:pPr>
-              <a:lnSpc>
-                <a:spcPts val="2200"/>
-              </a:lnSpc>
               <a:spcAft>
                 <a:spcPts val="1000"/>
               </a:spcAft>
+              <a:buChar char="•"/>
+              <a:lnSpc>
+                <a:spcPts val="2200"/>
+              </a:lnSpc>
             </a:pPr>
             <a:r>
               <a:rPr sz="2000" b="0">
@@ -4950,17 +6437,18 @@
                 </a:solidFill>
                 <a:latin typeface="Calibri"/>
               </a:rPr>
-              <a:t>• Format = serialization of structure</a:t>
+              <a:t>Start from structure, then consider size, update rate, and tooling</a:t>
             </a:r>
           </a:p>
           <a:p>
             <a:pPr>
-              <a:lnSpc>
-                <a:spcPts val="2200"/>
-              </a:lnSpc>
               <a:spcAft>
                 <a:spcPts val="1000"/>
               </a:spcAft>
+              <a:buChar char="•"/>
+              <a:lnSpc>
+                <a:spcPts val="2200"/>
+              </a:lnSpc>
             </a:pPr>
             <a:r>
               <a:rPr sz="2000" b="0">
@@ -4969,17 +6457,18 @@
                 </a:solidFill>
                 <a:latin typeface="Calibri"/>
               </a:rPr>
-              <a:t>• CSV and SQL dominate everyday tables</a:t>
+              <a:t>Prefer formats your team already supports</a:t>
             </a:r>
           </a:p>
           <a:p>
             <a:pPr>
-              <a:lnSpc>
-                <a:spcPts val="2200"/>
-              </a:lnSpc>
               <a:spcAft>
                 <a:spcPts val="1000"/>
               </a:spcAft>
+              <a:buChar char="•"/>
+              <a:lnSpc>
+                <a:spcPts val="2200"/>
+              </a:lnSpc>
             </a:pPr>
             <a:r>
               <a:rPr sz="2000" b="0">
@@ -4988,7 +6477,7 @@
                 </a:solidFill>
                 <a:latin typeface="Calibri"/>
               </a:rPr>
-              <a:t>• HDF5 and GeoJSON serve specialized shapes and scales</a:t>
+              <a:t>Metadata and documentation, covered next, make that choice durable</a:t>
             </a:r>
           </a:p>
         </p:txBody>
@@ -5027,7 +6516,7 @@
               </a:defRPr>
             </a:pPr>
             <a:r>
-              <a:t>Chapter 1 — Dataset Formats</a:t>
+              <a:t>Chapter 1 — 03 Dataset Formats</a:t>
             </a:r>
           </a:p>
         </p:txBody>
